--- a/class/3일차_4.pptx
+++ b/class/3일차_4.pptx
@@ -6,25 +6,27 @@
     <p:sldMasterId id="2147483650" r:id="rId2"/>
   </p:sldMasterIdLst>
   <p:notesMasterIdLst>
-    <p:notesMasterId r:id="rId19"/>
+    <p:notesMasterId r:id="rId21"/>
   </p:notesMasterIdLst>
   <p:sldIdLst>
     <p:sldId id="291" r:id="rId3"/>
-    <p:sldId id="293" r:id="rId4"/>
-    <p:sldId id="257" r:id="rId5"/>
-    <p:sldId id="258" r:id="rId6"/>
-    <p:sldId id="259" r:id="rId7"/>
-    <p:sldId id="260" r:id="rId8"/>
-    <p:sldId id="262" r:id="rId9"/>
-    <p:sldId id="263" r:id="rId10"/>
-    <p:sldId id="264" r:id="rId11"/>
-    <p:sldId id="267" r:id="rId12"/>
-    <p:sldId id="268" r:id="rId13"/>
-    <p:sldId id="269" r:id="rId14"/>
-    <p:sldId id="271" r:id="rId15"/>
-    <p:sldId id="272" r:id="rId16"/>
-    <p:sldId id="273" r:id="rId17"/>
-    <p:sldId id="292" r:id="rId18"/>
+    <p:sldId id="295" r:id="rId4"/>
+    <p:sldId id="293" r:id="rId5"/>
+    <p:sldId id="257" r:id="rId6"/>
+    <p:sldId id="258" r:id="rId7"/>
+    <p:sldId id="259" r:id="rId8"/>
+    <p:sldId id="260" r:id="rId9"/>
+    <p:sldId id="262" r:id="rId10"/>
+    <p:sldId id="263" r:id="rId11"/>
+    <p:sldId id="264" r:id="rId12"/>
+    <p:sldId id="267" r:id="rId13"/>
+    <p:sldId id="268" r:id="rId14"/>
+    <p:sldId id="269" r:id="rId15"/>
+    <p:sldId id="271" r:id="rId16"/>
+    <p:sldId id="272" r:id="rId17"/>
+    <p:sldId id="296" r:id="rId18"/>
+    <p:sldId id="273" r:id="rId19"/>
+    <p:sldId id="292" r:id="rId20"/>
   </p:sldIdLst>
   <p:sldSz cx="12192000" cy="6858000"/>
   <p:notesSz cx="6858000" cy="12192000"/>
@@ -440,7 +442,7 @@
           <a:p>
             <a:fld id="{F7021451-1387-4CA6-816F-3879F97B5CBC}" type="slidenum">
               <a:rPr lang="en-US"/>
-              <a:t>10</a:t>
+              <a:t>11</a:t>
             </a:fld>
             <a:endParaRPr lang="en-US"/>
           </a:p>
@@ -524,7 +526,7 @@
           <a:p>
             <a:fld id="{F7021451-1387-4CA6-816F-3879F97B5CBC}" type="slidenum">
               <a:rPr lang="en-US"/>
-              <a:t>11</a:t>
+              <a:t>12</a:t>
             </a:fld>
             <a:endParaRPr lang="en-US"/>
           </a:p>
@@ -608,7 +610,7 @@
           <a:p>
             <a:fld id="{F7021451-1387-4CA6-816F-3879F97B5CBC}" type="slidenum">
               <a:rPr lang="en-US"/>
-              <a:t>12</a:t>
+              <a:t>13</a:t>
             </a:fld>
             <a:endParaRPr lang="en-US"/>
           </a:p>
@@ -692,7 +694,7 @@
           <a:p>
             <a:fld id="{F7021451-1387-4CA6-816F-3879F97B5CBC}" type="slidenum">
               <a:rPr lang="en-US"/>
-              <a:t>13</a:t>
+              <a:t>14</a:t>
             </a:fld>
             <a:endParaRPr lang="en-US"/>
           </a:p>
@@ -776,7 +778,7 @@
           <a:p>
             <a:fld id="{F7021451-1387-4CA6-816F-3879F97B5CBC}" type="slidenum">
               <a:rPr lang="en-US"/>
-              <a:t>14</a:t>
+              <a:t>15</a:t>
             </a:fld>
             <a:endParaRPr lang="en-US"/>
           </a:p>
@@ -860,7 +862,7 @@
           <a:p>
             <a:fld id="{F7021451-1387-4CA6-816F-3879F97B5CBC}" type="slidenum">
               <a:rPr lang="en-US"/>
-              <a:t>15</a:t>
+              <a:t>17</a:t>
             </a:fld>
             <a:endParaRPr lang="en-US"/>
           </a:p>
@@ -1066,7 +1068,7 @@
           <a:p>
             <a:fld id="{F7021451-1387-4CA6-816F-3879F97B5CBC}" type="slidenum">
               <a:rPr lang="en-US"/>
-              <a:t>2</a:t>
+              <a:t>3</a:t>
             </a:fld>
             <a:endParaRPr lang="en-US"/>
           </a:p>
@@ -1150,7 +1152,7 @@
           <a:p>
             <a:fld id="{F7021451-1387-4CA6-816F-3879F97B5CBC}" type="slidenum">
               <a:rPr lang="en-US"/>
-              <a:t>3</a:t>
+              <a:t>4</a:t>
             </a:fld>
             <a:endParaRPr lang="en-US"/>
           </a:p>
@@ -1234,7 +1236,7 @@
           <a:p>
             <a:fld id="{F7021451-1387-4CA6-816F-3879F97B5CBC}" type="slidenum">
               <a:rPr lang="en-US"/>
-              <a:t>4</a:t>
+              <a:t>5</a:t>
             </a:fld>
             <a:endParaRPr lang="en-US"/>
           </a:p>
@@ -1318,7 +1320,7 @@
           <a:p>
             <a:fld id="{F7021451-1387-4CA6-816F-3879F97B5CBC}" type="slidenum">
               <a:rPr lang="en-US"/>
-              <a:t>5</a:t>
+              <a:t>6</a:t>
             </a:fld>
             <a:endParaRPr lang="en-US"/>
           </a:p>
@@ -1402,7 +1404,7 @@
           <a:p>
             <a:fld id="{F7021451-1387-4CA6-816F-3879F97B5CBC}" type="slidenum">
               <a:rPr lang="en-US"/>
-              <a:t>6</a:t>
+              <a:t>7</a:t>
             </a:fld>
             <a:endParaRPr lang="en-US"/>
           </a:p>
@@ -1486,7 +1488,7 @@
           <a:p>
             <a:fld id="{F7021451-1387-4CA6-816F-3879F97B5CBC}" type="slidenum">
               <a:rPr lang="en-US"/>
-              <a:t>7</a:t>
+              <a:t>8</a:t>
             </a:fld>
             <a:endParaRPr lang="en-US"/>
           </a:p>
@@ -1570,7 +1572,7 @@
           <a:p>
             <a:fld id="{F7021451-1387-4CA6-816F-3879F97B5CBC}" type="slidenum">
               <a:rPr lang="en-US"/>
-              <a:t>8</a:t>
+              <a:t>9</a:t>
             </a:fld>
             <a:endParaRPr lang="en-US"/>
           </a:p>
@@ -1654,7 +1656,7 @@
           <a:p>
             <a:fld id="{F7021451-1387-4CA6-816F-3879F97B5CBC}" type="slidenum">
               <a:rPr lang="en-US"/>
-              <a:t>9</a:t>
+              <a:t>10</a:t>
             </a:fld>
             <a:endParaRPr lang="en-US"/>
           </a:p>
@@ -8919,7 +8921,7 @@
               </a:rPr>
             </a:br>
             <a:r>
-              <a:rPr lang="ko-KR" altLang="en-US" sz="3200" b="1" dirty="0">
+              <a:rPr lang="ko-KR" altLang="en-US" sz="3200" b="1" dirty="0" err="1">
                 <a:solidFill>
                   <a:srgbClr val="FFFFFF"/>
                 </a:solidFill>
@@ -8928,7 +8930,7 @@
                 <a:cs typeface="Calibri Light" pitchFamily="34" charset="-120"/>
                 <a:sym typeface="Arial"/>
               </a:rPr>
-              <a:t>실습</a:t>
+              <a:t>임베딩</a:t>
             </a:r>
             <a:r>
               <a:rPr lang="en-US" altLang="ko-KR" sz="3200" b="1" dirty="0">
@@ -8940,7 +8942,7 @@
                 <a:cs typeface="Calibri Light" pitchFamily="34" charset="-120"/>
                 <a:sym typeface="Arial"/>
               </a:rPr>
-              <a:t>2:</a:t>
+              <a:t>,</a:t>
             </a:r>
             <a:r>
               <a:rPr lang="ko-KR" altLang="en-US" sz="3200" b="1" dirty="0">
@@ -8952,10 +8954,10 @@
                 <a:cs typeface="Calibri Light" pitchFamily="34" charset="-120"/>
                 <a:sym typeface="Arial"/>
               </a:rPr>
-              <a:t> </a:t>
-            </a:r>
-            <a:r>
-              <a:rPr lang="ko-KR" altLang="en-US" sz="3200" b="1" dirty="0" err="1">
+              <a:t> 벡터</a:t>
+            </a:r>
+            <a:r>
+              <a:rPr lang="en-US" altLang="ko-KR" sz="3200" b="1" dirty="0">
                 <a:solidFill>
                   <a:srgbClr val="FFFFFF"/>
                 </a:solidFill>
@@ -8964,46 +8966,10 @@
                 <a:cs typeface="Calibri Light" pitchFamily="34" charset="-120"/>
                 <a:sym typeface="Arial"/>
               </a:rPr>
-              <a:t>임베딩</a:t>
-            </a:r>
-            <a:r>
-              <a:rPr lang="en-US" altLang="ko-KR" sz="3200" b="1" dirty="0">
-                <a:solidFill>
-                  <a:srgbClr val="FFFFFF"/>
-                </a:solidFill>
-                <a:latin typeface="Calibri Light" pitchFamily="34" charset="0"/>
-                <a:ea typeface="Arial"/>
-                <a:cs typeface="Calibri Light" pitchFamily="34" charset="-120"/>
-                <a:sym typeface="Arial"/>
-              </a:rPr>
-              <a:t>,</a:t>
+              <a:t>DB </a:t>
             </a:r>
             <a:r>
               <a:rPr lang="ko-KR" altLang="en-US" sz="3200" b="1" dirty="0">
-                <a:solidFill>
-                  <a:srgbClr val="FFFFFF"/>
-                </a:solidFill>
-                <a:latin typeface="Calibri Light" pitchFamily="34" charset="0"/>
-                <a:ea typeface="Arial"/>
-                <a:cs typeface="Calibri Light" pitchFamily="34" charset="-120"/>
-                <a:sym typeface="Arial"/>
-              </a:rPr>
-              <a:t> 벡터</a:t>
-            </a:r>
-            <a:r>
-              <a:rPr lang="en-US" altLang="ko-KR" sz="3200" b="1" dirty="0">
-                <a:solidFill>
-                  <a:srgbClr val="FFFFFF"/>
-                </a:solidFill>
-                <a:latin typeface="Calibri Light" pitchFamily="34" charset="0"/>
-                <a:ea typeface="Arial"/>
-                <a:cs typeface="Calibri Light" pitchFamily="34" charset="-120"/>
-                <a:sym typeface="Arial"/>
-              </a:rPr>
-              <a:t>DB </a:t>
-            </a:r>
-            <a:r>
-              <a:rPr lang="ko-KR" altLang="en-US" sz="3200" b="1">
                 <a:solidFill>
                   <a:srgbClr val="FFFFFF"/>
                 </a:solidFill>
@@ -9202,6 +9168,1507 @@
 </file>
 
 <file path=ppt/slides/slide10.xml><?xml version="1.0" encoding="utf-8"?>
+<p:sld xmlns:a="http://schemas.openxmlformats.org/drawingml/2006/main" xmlns:r="http://schemas.openxmlformats.org/officeDocument/2006/relationships" xmlns:p="http://schemas.openxmlformats.org/presentationml/2006/main">
+  <p:cSld name="Slide 9">
+    <p:bg>
+      <p:bgPr>
+        <a:solidFill>
+          <a:srgbClr val="FFFFFF"/>
+        </a:solidFill>
+        <a:effectLst/>
+      </p:bgPr>
+    </p:bg>
+    <p:spTree>
+      <p:nvGrpSpPr>
+        <p:cNvPr id="1" name=""/>
+        <p:cNvGrpSpPr/>
+        <p:nvPr/>
+      </p:nvGrpSpPr>
+      <p:grpSpPr>
+        <a:xfrm>
+          <a:off x="0" y="0"/>
+          <a:ext cx="0" cy="0"/>
+          <a:chOff x="0" y="0"/>
+          <a:chExt cx="0" cy="0"/>
+        </a:xfrm>
+      </p:grpSpPr>
+      <p:sp>
+        <p:nvSpPr>
+          <p:cNvPr id="2" name="Text 0"/>
+          <p:cNvSpPr/>
+          <p:nvPr/>
+        </p:nvSpPr>
+        <p:spPr>
+          <a:xfrm>
+            <a:off x="365760" y="228600"/>
+            <a:ext cx="10972800" cy="365760"/>
+          </a:xfrm>
+          <a:prstGeom prst="rect">
+            <a:avLst/>
+          </a:prstGeom>
+          <a:noFill/>
+          <a:ln/>
+        </p:spPr>
+        <p:txBody>
+          <a:bodyPr wrap="square" lIns="0" tIns="0" rIns="0" bIns="0" rtlCol="0" anchor="ctr"/>
+          <a:lstStyle/>
+          <a:p>
+            <a:pPr marL="0" indent="0">
+              <a:buNone/>
+            </a:pPr>
+            <a:r>
+              <a:rPr lang="en-US" sz="1550" b="1" dirty="0">
+                <a:solidFill>
+                  <a:srgbClr val="111848"/>
+                </a:solidFill>
+                <a:latin typeface="Arial" pitchFamily="34" charset="0"/>
+                <a:ea typeface="Arial" pitchFamily="34" charset="-122"/>
+                <a:cs typeface="Arial" pitchFamily="34" charset="-120"/>
+              </a:rPr>
+              <a:t>🛡️ Step B-2 — 방어: M11 FAISS RAG + 출처 인용 강제</a:t>
+            </a:r>
+            <a:endParaRPr lang="en-US" sz="1550" dirty="0"/>
+          </a:p>
+        </p:txBody>
+      </p:sp>
+      <p:sp>
+        <p:nvSpPr>
+          <p:cNvPr id="3" name="Shape 1"/>
+          <p:cNvSpPr/>
+          <p:nvPr/>
+        </p:nvSpPr>
+        <p:spPr>
+          <a:xfrm>
+            <a:off x="0" y="548640"/>
+            <a:ext cx="12161520" cy="36576"/>
+          </a:xfrm>
+          <a:prstGeom prst="rect">
+            <a:avLst/>
+          </a:prstGeom>
+          <a:solidFill>
+            <a:srgbClr val="10B981"/>
+          </a:solidFill>
+          <a:ln/>
+        </p:spPr>
+        <p:txBody>
+          <a:bodyPr/>
+          <a:lstStyle/>
+          <a:p>
+            <a:endParaRPr lang="ko-KR" altLang="en-US"/>
+          </a:p>
+        </p:txBody>
+      </p:sp>
+      <p:sp>
+        <p:nvSpPr>
+          <p:cNvPr id="4" name="Shape 2"/>
+          <p:cNvSpPr/>
+          <p:nvPr/>
+        </p:nvSpPr>
+        <p:spPr>
+          <a:xfrm>
+            <a:off x="274320" y="640080"/>
+            <a:ext cx="5303520" cy="1920240"/>
+          </a:xfrm>
+          <a:prstGeom prst="rect">
+            <a:avLst/>
+          </a:prstGeom>
+          <a:solidFill>
+            <a:srgbClr val="FFFFFF"/>
+          </a:solidFill>
+          <a:ln w="15240">
+            <a:solidFill>
+              <a:srgbClr val="10B981"/>
+            </a:solidFill>
+            <a:prstDash val="solid"/>
+          </a:ln>
+          <a:effectLst>
+            <a:outerShdw blurRad="63500" dist="25400" dir="8100000" algn="bl" rotWithShape="0">
+              <a:srgbClr val="000000">
+                <a:alpha val="10000"/>
+              </a:srgbClr>
+            </a:outerShdw>
+          </a:effectLst>
+        </p:spPr>
+        <p:txBody>
+          <a:bodyPr/>
+          <a:lstStyle/>
+          <a:p>
+            <a:endParaRPr lang="ko-KR" altLang="en-US"/>
+          </a:p>
+        </p:txBody>
+      </p:sp>
+      <p:sp>
+        <p:nvSpPr>
+          <p:cNvPr id="5" name="Shape 3"/>
+          <p:cNvSpPr/>
+          <p:nvPr/>
+        </p:nvSpPr>
+        <p:spPr>
+          <a:xfrm>
+            <a:off x="274320" y="640080"/>
+            <a:ext cx="5303520" cy="329184"/>
+          </a:xfrm>
+          <a:prstGeom prst="rect">
+            <a:avLst/>
+          </a:prstGeom>
+          <a:solidFill>
+            <a:srgbClr val="10B981"/>
+          </a:solidFill>
+          <a:ln w="12700">
+            <a:solidFill>
+              <a:srgbClr val="10B981"/>
+            </a:solidFill>
+            <a:prstDash val="solid"/>
+          </a:ln>
+        </p:spPr>
+        <p:txBody>
+          <a:bodyPr/>
+          <a:lstStyle/>
+          <a:p>
+            <a:endParaRPr lang="ko-KR" altLang="en-US"/>
+          </a:p>
+        </p:txBody>
+      </p:sp>
+      <p:sp>
+        <p:nvSpPr>
+          <p:cNvPr id="6" name="Text 4"/>
+          <p:cNvSpPr/>
+          <p:nvPr/>
+        </p:nvSpPr>
+        <p:spPr>
+          <a:xfrm>
+            <a:off x="384048" y="640080"/>
+            <a:ext cx="5084064" cy="329184"/>
+          </a:xfrm>
+          <a:prstGeom prst="rect">
+            <a:avLst/>
+          </a:prstGeom>
+          <a:noFill/>
+          <a:ln/>
+        </p:spPr>
+        <p:txBody>
+          <a:bodyPr wrap="square" lIns="0" tIns="0" rIns="0" bIns="0" rtlCol="0" anchor="ctr"/>
+          <a:lstStyle/>
+          <a:p>
+            <a:pPr marL="0" indent="0">
+              <a:buNone/>
+            </a:pPr>
+            <a:r>
+              <a:rPr lang="en-US" sz="1100" b="1" dirty="0">
+                <a:solidFill>
+                  <a:srgbClr val="FFFFFF"/>
+                </a:solidFill>
+                <a:latin typeface="Arial" pitchFamily="34" charset="0"/>
+                <a:ea typeface="Arial" pitchFamily="34" charset="-122"/>
+                <a:cs typeface="Arial" pitchFamily="34" charset="-120"/>
+              </a:rPr>
+              <a:t>방어 전략: M11 FAISS RAG</a:t>
+            </a:r>
+            <a:endParaRPr lang="en-US" sz="1100" dirty="0"/>
+          </a:p>
+        </p:txBody>
+      </p:sp>
+      <p:sp>
+        <p:nvSpPr>
+          <p:cNvPr id="7" name="Text 5"/>
+          <p:cNvSpPr/>
+          <p:nvPr/>
+        </p:nvSpPr>
+        <p:spPr>
+          <a:xfrm>
+            <a:off x="411480" y="1042416"/>
+            <a:ext cx="5029200" cy="246888"/>
+          </a:xfrm>
+          <a:prstGeom prst="rect">
+            <a:avLst/>
+          </a:prstGeom>
+          <a:noFill/>
+          <a:ln/>
+        </p:spPr>
+        <p:txBody>
+          <a:bodyPr wrap="square" rtlCol="0" anchor="ctr"/>
+          <a:lstStyle/>
+          <a:p>
+            <a:pPr marL="0" indent="0">
+              <a:buNone/>
+            </a:pPr>
+            <a:r>
+              <a:rPr lang="en-US" sz="1000" b="1" dirty="0">
+                <a:solidFill>
+                  <a:srgbClr val="10B981"/>
+                </a:solidFill>
+                <a:latin typeface="Arial" pitchFamily="34" charset="0"/>
+                <a:ea typeface="Arial" pitchFamily="34" charset="-122"/>
+                <a:cs typeface="Arial" pitchFamily="34" charset="-120"/>
+              </a:rPr>
+              <a:t>DIST_THRESHOLD = 1.2 (L2 거리 임계값)</a:t>
+            </a:r>
+            <a:endParaRPr lang="en-US" sz="1000" dirty="0"/>
+          </a:p>
+        </p:txBody>
+      </p:sp>
+      <p:sp>
+        <p:nvSpPr>
+          <p:cNvPr id="8" name="Text 6"/>
+          <p:cNvSpPr/>
+          <p:nvPr/>
+        </p:nvSpPr>
+        <p:spPr>
+          <a:xfrm>
+            <a:off x="411480" y="1316736"/>
+            <a:ext cx="5029200" cy="246888"/>
+          </a:xfrm>
+          <a:prstGeom prst="rect">
+            <a:avLst/>
+          </a:prstGeom>
+          <a:noFill/>
+          <a:ln/>
+        </p:spPr>
+        <p:txBody>
+          <a:bodyPr wrap="square" rtlCol="0" anchor="ctr"/>
+          <a:lstStyle/>
+          <a:p>
+            <a:pPr marL="0" indent="0">
+              <a:buNone/>
+            </a:pPr>
+            <a:r>
+              <a:rPr lang="en-US" sz="1000" dirty="0">
+                <a:solidFill>
+                  <a:srgbClr val="111848"/>
+                </a:solidFill>
+                <a:latin typeface="Arial" pitchFamily="34" charset="0"/>
+                <a:ea typeface="Arial" pitchFamily="34" charset="-122"/>
+                <a:cs typeface="Arial" pitchFamily="34" charset="-120"/>
+              </a:rPr>
+              <a:t> • 임계값 초과 = '헌법에 없는 내용'으로 거부</a:t>
+            </a:r>
+            <a:endParaRPr lang="en-US" sz="1000" dirty="0"/>
+          </a:p>
+        </p:txBody>
+      </p:sp>
+      <p:sp>
+        <p:nvSpPr>
+          <p:cNvPr id="9" name="Text 7"/>
+          <p:cNvSpPr/>
+          <p:nvPr/>
+        </p:nvSpPr>
+        <p:spPr>
+          <a:xfrm>
+            <a:off x="411480" y="1591056"/>
+            <a:ext cx="5029200" cy="246888"/>
+          </a:xfrm>
+          <a:prstGeom prst="rect">
+            <a:avLst/>
+          </a:prstGeom>
+          <a:noFill/>
+          <a:ln/>
+        </p:spPr>
+        <p:txBody>
+          <a:bodyPr wrap="square" rtlCol="0" anchor="ctr"/>
+          <a:lstStyle/>
+          <a:p>
+            <a:pPr marL="0" indent="0">
+              <a:buNone/>
+            </a:pPr>
+            <a:r>
+              <a:rPr lang="en-US" sz="1000" dirty="0">
+                <a:solidFill>
+                  <a:srgbClr val="111848"/>
+                </a:solidFill>
+                <a:latin typeface="Arial" pitchFamily="34" charset="0"/>
+                <a:ea typeface="Arial" pitchFamily="34" charset="-122"/>
+                <a:cs typeface="Arial" pitchFamily="34" charset="-120"/>
+              </a:rPr>
+              <a:t> • 임계값 이하 = 관련 조항 + [출처:ID] 의무</a:t>
+            </a:r>
+            <a:endParaRPr lang="en-US" sz="1000" dirty="0"/>
+          </a:p>
+        </p:txBody>
+      </p:sp>
+      <p:sp>
+        <p:nvSpPr>
+          <p:cNvPr id="10" name="Text 8"/>
+          <p:cNvSpPr/>
+          <p:nvPr/>
+        </p:nvSpPr>
+        <p:spPr>
+          <a:xfrm>
+            <a:off x="411480" y="1865376"/>
+            <a:ext cx="5029200" cy="246888"/>
+          </a:xfrm>
+          <a:prstGeom prst="rect">
+            <a:avLst/>
+          </a:prstGeom>
+          <a:noFill/>
+          <a:ln/>
+        </p:spPr>
+        <p:txBody>
+          <a:bodyPr wrap="square" rtlCol="0" anchor="ctr"/>
+          <a:lstStyle/>
+          <a:p>
+            <a:pPr marL="0" indent="0">
+              <a:buNone/>
+            </a:pPr>
+            <a:r>
+              <a:rPr lang="en-US" sz="1000" dirty="0">
+                <a:solidFill>
+                  <a:srgbClr val="111848"/>
+                </a:solidFill>
+                <a:latin typeface="Arial" pitchFamily="34" charset="0"/>
+                <a:ea typeface="Arial" pitchFamily="34" charset="-122"/>
+                <a:cs typeface="Arial" pitchFamily="34" charset="-120"/>
+              </a:rPr>
+              <a:t>→ 근거 없으면 응답 불가 = 환각 차단</a:t>
+            </a:r>
+            <a:endParaRPr lang="en-US" sz="1000" dirty="0"/>
+          </a:p>
+        </p:txBody>
+      </p:sp>
+      <p:sp>
+        <p:nvSpPr>
+          <p:cNvPr id="11" name="Shape 9"/>
+          <p:cNvSpPr/>
+          <p:nvPr/>
+        </p:nvSpPr>
+        <p:spPr>
+          <a:xfrm>
+            <a:off x="274320" y="2670048"/>
+            <a:ext cx="5303520" cy="1463040"/>
+          </a:xfrm>
+          <a:prstGeom prst="rect">
+            <a:avLst/>
+          </a:prstGeom>
+          <a:solidFill>
+            <a:srgbClr val="FFFFFF"/>
+          </a:solidFill>
+          <a:ln w="15240">
+            <a:solidFill>
+              <a:srgbClr val="0F766E"/>
+            </a:solidFill>
+            <a:prstDash val="solid"/>
+          </a:ln>
+          <a:effectLst>
+            <a:outerShdw blurRad="63500" dist="25400" dir="8100000" algn="bl" rotWithShape="0">
+              <a:srgbClr val="000000">
+                <a:alpha val="10000"/>
+              </a:srgbClr>
+            </a:outerShdw>
+          </a:effectLst>
+        </p:spPr>
+        <p:txBody>
+          <a:bodyPr/>
+          <a:lstStyle/>
+          <a:p>
+            <a:endParaRPr lang="ko-KR" altLang="en-US"/>
+          </a:p>
+        </p:txBody>
+      </p:sp>
+      <p:sp>
+        <p:nvSpPr>
+          <p:cNvPr id="12" name="Shape 10"/>
+          <p:cNvSpPr/>
+          <p:nvPr/>
+        </p:nvSpPr>
+        <p:spPr>
+          <a:xfrm>
+            <a:off x="274320" y="2670048"/>
+            <a:ext cx="5303520" cy="329184"/>
+          </a:xfrm>
+          <a:prstGeom prst="rect">
+            <a:avLst/>
+          </a:prstGeom>
+          <a:solidFill>
+            <a:srgbClr val="0F766E"/>
+          </a:solidFill>
+          <a:ln w="12700">
+            <a:solidFill>
+              <a:srgbClr val="0F766E"/>
+            </a:solidFill>
+            <a:prstDash val="solid"/>
+          </a:ln>
+        </p:spPr>
+        <p:txBody>
+          <a:bodyPr/>
+          <a:lstStyle/>
+          <a:p>
+            <a:endParaRPr lang="ko-KR" altLang="en-US"/>
+          </a:p>
+        </p:txBody>
+      </p:sp>
+      <p:sp>
+        <p:nvSpPr>
+          <p:cNvPr id="13" name="Text 11"/>
+          <p:cNvSpPr/>
+          <p:nvPr/>
+        </p:nvSpPr>
+        <p:spPr>
+          <a:xfrm>
+            <a:off x="384048" y="2670048"/>
+            <a:ext cx="5084064" cy="329184"/>
+          </a:xfrm>
+          <a:prstGeom prst="rect">
+            <a:avLst/>
+          </a:prstGeom>
+          <a:noFill/>
+          <a:ln/>
+        </p:spPr>
+        <p:txBody>
+          <a:bodyPr wrap="square" lIns="0" tIns="0" rIns="0" bIns="0" rtlCol="0" anchor="ctr"/>
+          <a:lstStyle/>
+          <a:p>
+            <a:pPr marL="0" indent="0">
+              <a:buNone/>
+            </a:pPr>
+            <a:r>
+              <a:rPr lang="en-US" sz="1100" b="1" dirty="0">
+                <a:solidFill>
+                  <a:srgbClr val="FFFFFF"/>
+                </a:solidFill>
+                <a:latin typeface="Arial" pitchFamily="34" charset="0"/>
+                <a:ea typeface="Arial" pitchFamily="34" charset="-122"/>
+                <a:cs typeface="Arial" pitchFamily="34" charset="-120"/>
+              </a:rPr>
+              <a:t>DIST_THRESHOLD 트레이드오프</a:t>
+            </a:r>
+            <a:endParaRPr lang="en-US" sz="1100" dirty="0"/>
+          </a:p>
+        </p:txBody>
+      </p:sp>
+      <p:sp>
+        <p:nvSpPr>
+          <p:cNvPr id="14" name="Text 12"/>
+          <p:cNvSpPr/>
+          <p:nvPr/>
+        </p:nvSpPr>
+        <p:spPr>
+          <a:xfrm>
+            <a:off x="411480" y="3072384"/>
+            <a:ext cx="5029200" cy="246888"/>
+          </a:xfrm>
+          <a:prstGeom prst="rect">
+            <a:avLst/>
+          </a:prstGeom>
+          <a:noFill/>
+          <a:ln/>
+        </p:spPr>
+        <p:txBody>
+          <a:bodyPr wrap="square" rtlCol="0" anchor="ctr"/>
+          <a:lstStyle/>
+          <a:p>
+            <a:pPr marL="0" indent="0">
+              <a:buNone/>
+            </a:pPr>
+            <a:r>
+              <a:rPr lang="en-US" sz="1000" dirty="0">
+                <a:solidFill>
+                  <a:srgbClr val="111848"/>
+                </a:solidFill>
+                <a:latin typeface="Arial" pitchFamily="34" charset="0"/>
+                <a:ea typeface="Arial" pitchFamily="34" charset="-122"/>
+                <a:cs typeface="Arial" pitchFamily="34" charset="-120"/>
+              </a:rPr>
+              <a:t>너무 크게 설정 → 관련 없는 내용도 통과 (환각 증가)</a:t>
+            </a:r>
+            <a:endParaRPr lang="en-US" sz="1000" dirty="0"/>
+          </a:p>
+        </p:txBody>
+      </p:sp>
+      <p:sp>
+        <p:nvSpPr>
+          <p:cNvPr id="15" name="Text 13"/>
+          <p:cNvSpPr/>
+          <p:nvPr/>
+        </p:nvSpPr>
+        <p:spPr>
+          <a:xfrm>
+            <a:off x="411480" y="3346704"/>
+            <a:ext cx="5029200" cy="246888"/>
+          </a:xfrm>
+          <a:prstGeom prst="rect">
+            <a:avLst/>
+          </a:prstGeom>
+          <a:noFill/>
+          <a:ln/>
+        </p:spPr>
+        <p:txBody>
+          <a:bodyPr wrap="square" rtlCol="0" anchor="ctr"/>
+          <a:lstStyle/>
+          <a:p>
+            <a:pPr marL="0" indent="0">
+              <a:buNone/>
+            </a:pPr>
+            <a:r>
+              <a:rPr lang="en-US" sz="1000" dirty="0">
+                <a:solidFill>
+                  <a:srgbClr val="111848"/>
+                </a:solidFill>
+                <a:latin typeface="Arial" pitchFamily="34" charset="0"/>
+                <a:ea typeface="Arial" pitchFamily="34" charset="-122"/>
+                <a:cs typeface="Arial" pitchFamily="34" charset="-120"/>
+              </a:rPr>
+              <a:t>너무 작게 설정 → 실제 관련 조항도 거부 (재현율 감소)</a:t>
+            </a:r>
+            <a:endParaRPr lang="en-US" sz="1000" dirty="0"/>
+          </a:p>
+        </p:txBody>
+      </p:sp>
+      <p:sp>
+        <p:nvSpPr>
+          <p:cNvPr id="16" name="Text 14"/>
+          <p:cNvSpPr/>
+          <p:nvPr/>
+        </p:nvSpPr>
+        <p:spPr>
+          <a:xfrm>
+            <a:off x="411480" y="3621024"/>
+            <a:ext cx="5029200" cy="246888"/>
+          </a:xfrm>
+          <a:prstGeom prst="rect">
+            <a:avLst/>
+          </a:prstGeom>
+          <a:noFill/>
+          <a:ln/>
+        </p:spPr>
+        <p:txBody>
+          <a:bodyPr wrap="square" rtlCol="0" anchor="ctr"/>
+          <a:lstStyle/>
+          <a:p>
+            <a:pPr marL="0" indent="0">
+              <a:buNone/>
+            </a:pPr>
+            <a:r>
+              <a:rPr lang="en-US" sz="1000" b="1" dirty="0">
+                <a:solidFill>
+                  <a:srgbClr val="0F766E"/>
+                </a:solidFill>
+                <a:latin typeface="Arial" pitchFamily="34" charset="0"/>
+                <a:ea typeface="Arial" pitchFamily="34" charset="-122"/>
+                <a:cs typeface="Arial" pitchFamily="34" charset="-120"/>
+              </a:rPr>
+              <a:t>→ 워크시트 주제: 정밀도 vs 재현율 트레이드오프</a:t>
+            </a:r>
+            <a:endParaRPr lang="en-US" sz="1000" dirty="0"/>
+          </a:p>
+        </p:txBody>
+      </p:sp>
+      <p:sp>
+        <p:nvSpPr>
+          <p:cNvPr id="17" name="Text 15"/>
+          <p:cNvSpPr/>
+          <p:nvPr/>
+        </p:nvSpPr>
+        <p:spPr>
+          <a:xfrm>
+            <a:off x="5760720" y="640080"/>
+            <a:ext cx="6126480" cy="320040"/>
+          </a:xfrm>
+          <a:prstGeom prst="rect">
+            <a:avLst/>
+          </a:prstGeom>
+          <a:noFill/>
+          <a:ln/>
+        </p:spPr>
+        <p:txBody>
+          <a:bodyPr wrap="square" rtlCol="0" anchor="ctr"/>
+          <a:lstStyle/>
+          <a:p>
+            <a:pPr marL="0" indent="0">
+              <a:buNone/>
+            </a:pPr>
+            <a:r>
+              <a:rPr lang="en-US" sz="1200" b="1" dirty="0">
+                <a:solidFill>
+                  <a:srgbClr val="111848"/>
+                </a:solidFill>
+                <a:latin typeface="Arial" pitchFamily="34" charset="0"/>
+                <a:ea typeface="Arial" pitchFamily="34" charset="-122"/>
+                <a:cs typeface="Arial" pitchFamily="34" charset="-120"/>
+              </a:rPr>
+              <a:t>Cell 22: 실행 코드</a:t>
+            </a:r>
+            <a:endParaRPr lang="en-US" sz="1200" dirty="0"/>
+          </a:p>
+        </p:txBody>
+      </p:sp>
+      <p:sp>
+        <p:nvSpPr>
+          <p:cNvPr id="18" name="Shape 16"/>
+          <p:cNvSpPr/>
+          <p:nvPr/>
+        </p:nvSpPr>
+        <p:spPr>
+          <a:xfrm>
+            <a:off x="5760720" y="1005839"/>
+            <a:ext cx="6126480" cy="5424777"/>
+          </a:xfrm>
+          <a:prstGeom prst="rect">
+            <a:avLst/>
+          </a:prstGeom>
+          <a:solidFill>
+            <a:srgbClr val="0D1117"/>
+          </a:solidFill>
+          <a:ln/>
+          <a:effectLst>
+            <a:outerShdw blurRad="63500" dist="25400" dir="8100000" algn="bl" rotWithShape="0">
+              <a:srgbClr val="000000">
+                <a:alpha val="10000"/>
+              </a:srgbClr>
+            </a:outerShdw>
+          </a:effectLst>
+        </p:spPr>
+        <p:txBody>
+          <a:bodyPr/>
+          <a:lstStyle/>
+          <a:p>
+            <a:endParaRPr lang="ko-KR" altLang="en-US"/>
+          </a:p>
+        </p:txBody>
+      </p:sp>
+      <p:sp>
+        <p:nvSpPr>
+          <p:cNvPr id="19" name="Text 17"/>
+          <p:cNvSpPr/>
+          <p:nvPr/>
+        </p:nvSpPr>
+        <p:spPr>
+          <a:xfrm>
+            <a:off x="5897880" y="1115568"/>
+            <a:ext cx="5852160" cy="228600"/>
+          </a:xfrm>
+          <a:prstGeom prst="rect">
+            <a:avLst/>
+          </a:prstGeom>
+          <a:noFill/>
+          <a:ln/>
+        </p:spPr>
+        <p:txBody>
+          <a:bodyPr wrap="square" lIns="0" tIns="0" rIns="0" bIns="0" rtlCol="0" anchor="ctr"/>
+          <a:lstStyle/>
+          <a:p>
+            <a:pPr marL="0" indent="0">
+              <a:buNone/>
+            </a:pPr>
+            <a:r>
+              <a:rPr lang="en-US" sz="950" dirty="0">
+                <a:solidFill>
+                  <a:srgbClr val="F59E0B"/>
+                </a:solidFill>
+                <a:latin typeface="Consolas" pitchFamily="34" charset="0"/>
+                <a:ea typeface="Consolas" pitchFamily="34" charset="-122"/>
+                <a:cs typeface="Consolas" pitchFamily="34" charset="-120"/>
+              </a:rPr>
+              <a:t>DIST_THRESHOLD = 1.2  # L2 거리 임계값</a:t>
+            </a:r>
+            <a:endParaRPr lang="en-US" sz="950" dirty="0"/>
+          </a:p>
+        </p:txBody>
+      </p:sp>
+      <p:sp>
+        <p:nvSpPr>
+          <p:cNvPr id="20" name="Text 18"/>
+          <p:cNvSpPr/>
+          <p:nvPr/>
+        </p:nvSpPr>
+        <p:spPr>
+          <a:xfrm>
+            <a:off x="5897880" y="1362456"/>
+            <a:ext cx="5852160" cy="228600"/>
+          </a:xfrm>
+          <a:prstGeom prst="rect">
+            <a:avLst/>
+          </a:prstGeom>
+          <a:noFill/>
+          <a:ln/>
+        </p:spPr>
+        <p:txBody>
+          <a:bodyPr wrap="square" lIns="0" tIns="0" rIns="0" bIns="0" rtlCol="0" anchor="ctr"/>
+          <a:lstStyle/>
+          <a:p>
+            <a:pPr marL="0" indent="0">
+              <a:buNone/>
+            </a:pPr>
+            <a:endParaRPr lang="en-US" sz="950" dirty="0"/>
+          </a:p>
+        </p:txBody>
+      </p:sp>
+      <p:sp>
+        <p:nvSpPr>
+          <p:cNvPr id="21" name="Text 19"/>
+          <p:cNvSpPr/>
+          <p:nvPr/>
+        </p:nvSpPr>
+        <p:spPr>
+          <a:xfrm>
+            <a:off x="5897880" y="1609344"/>
+            <a:ext cx="5852160" cy="228600"/>
+          </a:xfrm>
+          <a:prstGeom prst="rect">
+            <a:avLst/>
+          </a:prstGeom>
+          <a:noFill/>
+          <a:ln/>
+        </p:spPr>
+        <p:txBody>
+          <a:bodyPr wrap="square" lIns="0" tIns="0" rIns="0" bIns="0" rtlCol="0" anchor="ctr"/>
+          <a:lstStyle/>
+          <a:p>
+            <a:pPr marL="0" indent="0">
+              <a:buNone/>
+            </a:pPr>
+            <a:r>
+              <a:rPr lang="en-US" sz="950" dirty="0">
+                <a:solidFill>
+                  <a:srgbClr val="E6EDF3"/>
+                </a:solidFill>
+                <a:latin typeface="Consolas" pitchFamily="34" charset="0"/>
+                <a:ea typeface="Consolas" pitchFamily="34" charset="-122"/>
+                <a:cs typeface="Consolas" pitchFamily="34" charset="-120"/>
+              </a:rPr>
+              <a:t>def rag_ask(query):</a:t>
+            </a:r>
+            <a:endParaRPr lang="en-US" sz="950" dirty="0"/>
+          </a:p>
+        </p:txBody>
+      </p:sp>
+      <p:sp>
+        <p:nvSpPr>
+          <p:cNvPr id="22" name="Text 20"/>
+          <p:cNvSpPr/>
+          <p:nvPr/>
+        </p:nvSpPr>
+        <p:spPr>
+          <a:xfrm>
+            <a:off x="5897880" y="1856232"/>
+            <a:ext cx="5852160" cy="228600"/>
+          </a:xfrm>
+          <a:prstGeom prst="rect">
+            <a:avLst/>
+          </a:prstGeom>
+          <a:noFill/>
+          <a:ln/>
+        </p:spPr>
+        <p:txBody>
+          <a:bodyPr wrap="square" lIns="0" tIns="0" rIns="0" bIns="0" rtlCol="0" anchor="ctr"/>
+          <a:lstStyle/>
+          <a:p>
+            <a:pPr marL="0" indent="0">
+              <a:buNone/>
+            </a:pPr>
+            <a:r>
+              <a:rPr lang="en-US" sz="950" dirty="0">
+                <a:solidFill>
+                  <a:srgbClr val="8B949E"/>
+                </a:solidFill>
+                <a:latin typeface="Consolas" pitchFamily="34" charset="0"/>
+                <a:ea typeface="Consolas" pitchFamily="34" charset="-122"/>
+                <a:cs typeface="Consolas" pitchFamily="34" charset="-120"/>
+              </a:rPr>
+              <a:t>    # ① FAISS 유사도 검색 (L2 거리)</a:t>
+            </a:r>
+            <a:endParaRPr lang="en-US" sz="950" dirty="0"/>
+          </a:p>
+        </p:txBody>
+      </p:sp>
+      <p:sp>
+        <p:nvSpPr>
+          <p:cNvPr id="23" name="Text 21"/>
+          <p:cNvSpPr/>
+          <p:nvPr/>
+        </p:nvSpPr>
+        <p:spPr>
+          <a:xfrm>
+            <a:off x="5897880" y="2103120"/>
+            <a:ext cx="5852160" cy="228600"/>
+          </a:xfrm>
+          <a:prstGeom prst="rect">
+            <a:avLst/>
+          </a:prstGeom>
+          <a:noFill/>
+          <a:ln/>
+        </p:spPr>
+        <p:txBody>
+          <a:bodyPr wrap="square" lIns="0" tIns="0" rIns="0" bIns="0" rtlCol="0" anchor="ctr"/>
+          <a:lstStyle/>
+          <a:p>
+            <a:pPr marL="0" indent="0">
+              <a:buNone/>
+            </a:pPr>
+            <a:r>
+              <a:rPr lang="en-US" sz="950" dirty="0">
+                <a:solidFill>
+                  <a:srgbClr val="E6EDF3"/>
+                </a:solidFill>
+                <a:latin typeface="Consolas" pitchFamily="34" charset="0"/>
+                <a:ea typeface="Consolas" pitchFamily="34" charset="-122"/>
+                <a:cs typeface="Consolas" pitchFamily="34" charset="-120"/>
+              </a:rPr>
+              <a:t>    results = vectordb.similarity_search_with_score(</a:t>
+            </a:r>
+            <a:endParaRPr lang="en-US" sz="950" dirty="0"/>
+          </a:p>
+        </p:txBody>
+      </p:sp>
+      <p:sp>
+        <p:nvSpPr>
+          <p:cNvPr id="24" name="Text 22"/>
+          <p:cNvSpPr/>
+          <p:nvPr/>
+        </p:nvSpPr>
+        <p:spPr>
+          <a:xfrm>
+            <a:off x="5897880" y="2350008"/>
+            <a:ext cx="5852160" cy="228600"/>
+          </a:xfrm>
+          <a:prstGeom prst="rect">
+            <a:avLst/>
+          </a:prstGeom>
+          <a:noFill/>
+          <a:ln/>
+        </p:spPr>
+        <p:txBody>
+          <a:bodyPr wrap="square" lIns="0" tIns="0" rIns="0" bIns="0" rtlCol="0" anchor="ctr"/>
+          <a:lstStyle/>
+          <a:p>
+            <a:pPr marL="0" indent="0">
+              <a:buNone/>
+            </a:pPr>
+            <a:r>
+              <a:rPr lang="en-US" sz="950" dirty="0">
+                <a:solidFill>
+                  <a:srgbClr val="E6EDF3"/>
+                </a:solidFill>
+                <a:latin typeface="Consolas" pitchFamily="34" charset="0"/>
+                <a:ea typeface="Consolas" pitchFamily="34" charset="-122"/>
+                <a:cs typeface="Consolas" pitchFamily="34" charset="-120"/>
+              </a:rPr>
+              <a:t>        query, k=4)</a:t>
+            </a:r>
+            <a:endParaRPr lang="en-US" sz="950" dirty="0"/>
+          </a:p>
+        </p:txBody>
+      </p:sp>
+      <p:sp>
+        <p:nvSpPr>
+          <p:cNvPr id="25" name="Text 23"/>
+          <p:cNvSpPr/>
+          <p:nvPr/>
+        </p:nvSpPr>
+        <p:spPr>
+          <a:xfrm>
+            <a:off x="5897880" y="2596896"/>
+            <a:ext cx="5852160" cy="228600"/>
+          </a:xfrm>
+          <a:prstGeom prst="rect">
+            <a:avLst/>
+          </a:prstGeom>
+          <a:noFill/>
+          <a:ln/>
+        </p:spPr>
+        <p:txBody>
+          <a:bodyPr wrap="square" lIns="0" tIns="0" rIns="0" bIns="0" rtlCol="0" anchor="ctr"/>
+          <a:lstStyle/>
+          <a:p>
+            <a:pPr marL="0" indent="0">
+              <a:buNone/>
+            </a:pPr>
+            <a:r>
+              <a:rPr lang="en-US" sz="950" dirty="0">
+                <a:solidFill>
+                  <a:srgbClr val="8B949E"/>
+                </a:solidFill>
+                <a:latin typeface="Consolas" pitchFamily="34" charset="0"/>
+                <a:ea typeface="Consolas" pitchFamily="34" charset="-122"/>
+                <a:cs typeface="Consolas" pitchFamily="34" charset="-120"/>
+              </a:rPr>
+              <a:t>    # ② 임계값 필터</a:t>
+            </a:r>
+            <a:endParaRPr lang="en-US" sz="950" dirty="0"/>
+          </a:p>
+        </p:txBody>
+      </p:sp>
+      <p:sp>
+        <p:nvSpPr>
+          <p:cNvPr id="26" name="Text 24"/>
+          <p:cNvSpPr/>
+          <p:nvPr/>
+        </p:nvSpPr>
+        <p:spPr>
+          <a:xfrm>
+            <a:off x="5897880" y="2843784"/>
+            <a:ext cx="5852160" cy="228600"/>
+          </a:xfrm>
+          <a:prstGeom prst="rect">
+            <a:avLst/>
+          </a:prstGeom>
+          <a:noFill/>
+          <a:ln/>
+        </p:spPr>
+        <p:txBody>
+          <a:bodyPr wrap="square" lIns="0" tIns="0" rIns="0" bIns="0" rtlCol="0" anchor="ctr"/>
+          <a:lstStyle/>
+          <a:p>
+            <a:pPr marL="0" indent="0">
+              <a:buNone/>
+            </a:pPr>
+            <a:r>
+              <a:rPr lang="en-US" sz="950" dirty="0">
+                <a:solidFill>
+                  <a:srgbClr val="E6EDF3"/>
+                </a:solidFill>
+                <a:latin typeface="Consolas" pitchFamily="34" charset="0"/>
+                <a:ea typeface="Consolas" pitchFamily="34" charset="-122"/>
+                <a:cs typeface="Consolas" pitchFamily="34" charset="-120"/>
+              </a:rPr>
+              <a:t>    relevant = [(doc, score)</a:t>
+            </a:r>
+            <a:endParaRPr lang="en-US" sz="950" dirty="0"/>
+          </a:p>
+        </p:txBody>
+      </p:sp>
+      <p:sp>
+        <p:nvSpPr>
+          <p:cNvPr id="27" name="Text 25"/>
+          <p:cNvSpPr/>
+          <p:nvPr/>
+        </p:nvSpPr>
+        <p:spPr>
+          <a:xfrm>
+            <a:off x="5897880" y="3090672"/>
+            <a:ext cx="5852160" cy="228600"/>
+          </a:xfrm>
+          <a:prstGeom prst="rect">
+            <a:avLst/>
+          </a:prstGeom>
+          <a:noFill/>
+          <a:ln/>
+        </p:spPr>
+        <p:txBody>
+          <a:bodyPr wrap="square" lIns="0" tIns="0" rIns="0" bIns="0" rtlCol="0" anchor="ctr"/>
+          <a:lstStyle/>
+          <a:p>
+            <a:pPr marL="0" indent="0">
+              <a:buNone/>
+            </a:pPr>
+            <a:r>
+              <a:rPr lang="en-US" sz="950" dirty="0">
+                <a:solidFill>
+                  <a:srgbClr val="E6EDF3"/>
+                </a:solidFill>
+                <a:latin typeface="Consolas" pitchFamily="34" charset="0"/>
+                <a:ea typeface="Consolas" pitchFamily="34" charset="-122"/>
+                <a:cs typeface="Consolas" pitchFamily="34" charset="-120"/>
+              </a:rPr>
+              <a:t>                for doc, score in results</a:t>
+            </a:r>
+            <a:endParaRPr lang="en-US" sz="950" dirty="0"/>
+          </a:p>
+        </p:txBody>
+      </p:sp>
+      <p:sp>
+        <p:nvSpPr>
+          <p:cNvPr id="28" name="Text 26"/>
+          <p:cNvSpPr/>
+          <p:nvPr/>
+        </p:nvSpPr>
+        <p:spPr>
+          <a:xfrm>
+            <a:off x="5897880" y="3337560"/>
+            <a:ext cx="5852160" cy="228600"/>
+          </a:xfrm>
+          <a:prstGeom prst="rect">
+            <a:avLst/>
+          </a:prstGeom>
+          <a:noFill/>
+          <a:ln/>
+        </p:spPr>
+        <p:txBody>
+          <a:bodyPr wrap="square" lIns="0" tIns="0" rIns="0" bIns="0" rtlCol="0" anchor="ctr"/>
+          <a:lstStyle/>
+          <a:p>
+            <a:pPr marL="0" indent="0">
+              <a:buNone/>
+            </a:pPr>
+            <a:r>
+              <a:rPr lang="en-US" sz="950" dirty="0">
+                <a:solidFill>
+                  <a:srgbClr val="10B981"/>
+                </a:solidFill>
+                <a:latin typeface="Consolas" pitchFamily="34" charset="0"/>
+                <a:ea typeface="Consolas" pitchFamily="34" charset="-122"/>
+                <a:cs typeface="Consolas" pitchFamily="34" charset="-120"/>
+              </a:rPr>
+              <a:t>                if score &lt; DIST_THRESHOLD]</a:t>
+            </a:r>
+            <a:endParaRPr lang="en-US" sz="950" dirty="0"/>
+          </a:p>
+        </p:txBody>
+      </p:sp>
+      <p:sp>
+        <p:nvSpPr>
+          <p:cNvPr id="29" name="Text 27"/>
+          <p:cNvSpPr/>
+          <p:nvPr/>
+        </p:nvSpPr>
+        <p:spPr>
+          <a:xfrm>
+            <a:off x="5897880" y="3584448"/>
+            <a:ext cx="5852160" cy="228600"/>
+          </a:xfrm>
+          <a:prstGeom prst="rect">
+            <a:avLst/>
+          </a:prstGeom>
+          <a:noFill/>
+          <a:ln/>
+        </p:spPr>
+        <p:txBody>
+          <a:bodyPr wrap="square" lIns="0" tIns="0" rIns="0" bIns="0" rtlCol="0" anchor="ctr"/>
+          <a:lstStyle/>
+          <a:p>
+            <a:pPr marL="0" indent="0">
+              <a:buNone/>
+            </a:pPr>
+            <a:r>
+              <a:rPr lang="en-US" sz="950" dirty="0">
+                <a:solidFill>
+                  <a:srgbClr val="E6EDF3"/>
+                </a:solidFill>
+                <a:latin typeface="Consolas" pitchFamily="34" charset="0"/>
+                <a:ea typeface="Consolas" pitchFamily="34" charset="-122"/>
+                <a:cs typeface="Consolas" pitchFamily="34" charset="-120"/>
+              </a:rPr>
+              <a:t>    if not relevant:</a:t>
+            </a:r>
+            <a:endParaRPr lang="en-US" sz="950" dirty="0"/>
+          </a:p>
+        </p:txBody>
+      </p:sp>
+      <p:sp>
+        <p:nvSpPr>
+          <p:cNvPr id="30" name="Text 28"/>
+          <p:cNvSpPr/>
+          <p:nvPr/>
+        </p:nvSpPr>
+        <p:spPr>
+          <a:xfrm>
+            <a:off x="5897880" y="3831336"/>
+            <a:ext cx="5852160" cy="228600"/>
+          </a:xfrm>
+          <a:prstGeom prst="rect">
+            <a:avLst/>
+          </a:prstGeom>
+          <a:noFill/>
+          <a:ln/>
+        </p:spPr>
+        <p:txBody>
+          <a:bodyPr wrap="square" lIns="0" tIns="0" rIns="0" bIns="0" rtlCol="0" anchor="ctr"/>
+          <a:lstStyle/>
+          <a:p>
+            <a:pPr marL="0" indent="0">
+              <a:buNone/>
+            </a:pPr>
+            <a:r>
+              <a:rPr lang="en-US" sz="950" dirty="0">
+                <a:solidFill>
+                  <a:srgbClr val="DC2626"/>
+                </a:solidFill>
+                <a:latin typeface="Consolas" pitchFamily="34" charset="0"/>
+                <a:ea typeface="Consolas" pitchFamily="34" charset="-122"/>
+                <a:cs typeface="Consolas" pitchFamily="34" charset="-120"/>
+              </a:rPr>
+              <a:t>        return '관련 근거 문서를 찾지 못했습니다.'</a:t>
+            </a:r>
+            <a:endParaRPr lang="en-US" sz="950" dirty="0"/>
+          </a:p>
+        </p:txBody>
+      </p:sp>
+      <p:sp>
+        <p:nvSpPr>
+          <p:cNvPr id="31" name="Text 29"/>
+          <p:cNvSpPr/>
+          <p:nvPr/>
+        </p:nvSpPr>
+        <p:spPr>
+          <a:xfrm>
+            <a:off x="5897880" y="4078224"/>
+            <a:ext cx="5852160" cy="228600"/>
+          </a:xfrm>
+          <a:prstGeom prst="rect">
+            <a:avLst/>
+          </a:prstGeom>
+          <a:noFill/>
+          <a:ln/>
+        </p:spPr>
+        <p:txBody>
+          <a:bodyPr wrap="square" lIns="0" tIns="0" rIns="0" bIns="0" rtlCol="0" anchor="ctr"/>
+          <a:lstStyle/>
+          <a:p>
+            <a:pPr marL="0" indent="0">
+              <a:buNone/>
+            </a:pPr>
+            <a:r>
+              <a:rPr lang="en-US" sz="950" dirty="0">
+                <a:solidFill>
+                  <a:srgbClr val="8B949E"/>
+                </a:solidFill>
+                <a:latin typeface="Consolas" pitchFamily="34" charset="0"/>
+                <a:ea typeface="Consolas" pitchFamily="34" charset="-122"/>
+                <a:cs typeface="Consolas" pitchFamily="34" charset="-120"/>
+              </a:rPr>
+              <a:t>    # ③ 관련 문서만 컨텍스트에 삽입</a:t>
+            </a:r>
+            <a:endParaRPr lang="en-US" sz="950" dirty="0"/>
+          </a:p>
+        </p:txBody>
+      </p:sp>
+      <p:sp>
+        <p:nvSpPr>
+          <p:cNvPr id="32" name="Text 30"/>
+          <p:cNvSpPr/>
+          <p:nvPr/>
+        </p:nvSpPr>
+        <p:spPr>
+          <a:xfrm>
+            <a:off x="5897880" y="4325112"/>
+            <a:ext cx="5852160" cy="228600"/>
+          </a:xfrm>
+          <a:prstGeom prst="rect">
+            <a:avLst/>
+          </a:prstGeom>
+          <a:noFill/>
+          <a:ln/>
+        </p:spPr>
+        <p:txBody>
+          <a:bodyPr wrap="square" lIns="0" tIns="0" rIns="0" bIns="0" rtlCol="0" anchor="ctr"/>
+          <a:lstStyle/>
+          <a:p>
+            <a:pPr marL="0" indent="0">
+              <a:buNone/>
+            </a:pPr>
+            <a:r>
+              <a:rPr lang="en-US" sz="950" dirty="0">
+                <a:solidFill>
+                  <a:srgbClr val="E6EDF3"/>
+                </a:solidFill>
+                <a:latin typeface="Consolas" pitchFamily="34" charset="0"/>
+                <a:ea typeface="Consolas" pitchFamily="34" charset="-122"/>
+                <a:cs typeface="Consolas" pitchFamily="34" charset="-120"/>
+              </a:rPr>
+              <a:t>    context = '\n'.join(</a:t>
+            </a:r>
+            <a:endParaRPr lang="en-US" sz="950" dirty="0"/>
+          </a:p>
+        </p:txBody>
+      </p:sp>
+      <p:sp>
+        <p:nvSpPr>
+          <p:cNvPr id="33" name="Text 31"/>
+          <p:cNvSpPr/>
+          <p:nvPr/>
+        </p:nvSpPr>
+        <p:spPr>
+          <a:xfrm>
+            <a:off x="5897880" y="4572000"/>
+            <a:ext cx="5852160" cy="228600"/>
+          </a:xfrm>
+          <a:prstGeom prst="rect">
+            <a:avLst/>
+          </a:prstGeom>
+          <a:noFill/>
+          <a:ln/>
+        </p:spPr>
+        <p:txBody>
+          <a:bodyPr wrap="square" lIns="0" tIns="0" rIns="0" bIns="0" rtlCol="0" anchor="ctr"/>
+          <a:lstStyle/>
+          <a:p>
+            <a:pPr marL="0" indent="0">
+              <a:buNone/>
+            </a:pPr>
+            <a:r>
+              <a:rPr lang="en-US" sz="950" dirty="0">
+                <a:solidFill>
+                  <a:srgbClr val="E6EDF3"/>
+                </a:solidFill>
+                <a:latin typeface="Consolas" pitchFamily="34" charset="0"/>
+                <a:ea typeface="Consolas" pitchFamily="34" charset="-122"/>
+                <a:cs typeface="Consolas" pitchFamily="34" charset="-120"/>
+              </a:rPr>
+              <a:t>        [f'[출처:{doc.metadata}]\n{doc.page_content}'</a:t>
+            </a:r>
+            <a:endParaRPr lang="en-US" sz="950" dirty="0"/>
+          </a:p>
+        </p:txBody>
+      </p:sp>
+      <p:sp>
+        <p:nvSpPr>
+          <p:cNvPr id="34" name="Text 32"/>
+          <p:cNvSpPr/>
+          <p:nvPr/>
+        </p:nvSpPr>
+        <p:spPr>
+          <a:xfrm>
+            <a:off x="5897880" y="4818888"/>
+            <a:ext cx="5852160" cy="228600"/>
+          </a:xfrm>
+          <a:prstGeom prst="rect">
+            <a:avLst/>
+          </a:prstGeom>
+          <a:noFill/>
+          <a:ln/>
+        </p:spPr>
+        <p:txBody>
+          <a:bodyPr wrap="square" lIns="0" tIns="0" rIns="0" bIns="0" rtlCol="0" anchor="ctr"/>
+          <a:lstStyle/>
+          <a:p>
+            <a:pPr marL="0" indent="0">
+              <a:buNone/>
+            </a:pPr>
+            <a:r>
+              <a:rPr lang="en-US" sz="950" dirty="0">
+                <a:solidFill>
+                  <a:srgbClr val="E6EDF3"/>
+                </a:solidFill>
+                <a:latin typeface="Consolas" pitchFamily="34" charset="0"/>
+                <a:ea typeface="Consolas" pitchFamily="34" charset="-122"/>
+                <a:cs typeface="Consolas" pitchFamily="34" charset="-120"/>
+              </a:rPr>
+              <a:t>         for doc, _ in relevant])</a:t>
+            </a:r>
+            <a:endParaRPr lang="en-US" sz="950" dirty="0"/>
+          </a:p>
+        </p:txBody>
+      </p:sp>
+      <p:sp>
+        <p:nvSpPr>
+          <p:cNvPr id="35" name="Text 33"/>
+          <p:cNvSpPr/>
+          <p:nvPr/>
+        </p:nvSpPr>
+        <p:spPr>
+          <a:xfrm>
+            <a:off x="5897880" y="5065776"/>
+            <a:ext cx="5852160" cy="228600"/>
+          </a:xfrm>
+          <a:prstGeom prst="rect">
+            <a:avLst/>
+          </a:prstGeom>
+          <a:noFill/>
+          <a:ln/>
+        </p:spPr>
+        <p:txBody>
+          <a:bodyPr wrap="square" lIns="0" tIns="0" rIns="0" bIns="0" rtlCol="0" anchor="ctr"/>
+          <a:lstStyle/>
+          <a:p>
+            <a:pPr marL="0" indent="0">
+              <a:buNone/>
+            </a:pPr>
+            <a:r>
+              <a:rPr lang="en-US" sz="950" dirty="0">
+                <a:solidFill>
+                  <a:srgbClr val="E6EDF3"/>
+                </a:solidFill>
+                <a:latin typeface="Consolas" pitchFamily="34" charset="0"/>
+                <a:ea typeface="Consolas" pitchFamily="34" charset="-122"/>
+                <a:cs typeface="Consolas" pitchFamily="34" charset="-120"/>
+              </a:rPr>
+              <a:t>    sys = (f'반드시 아래 헌법 원문에서만 답하라.\n'</a:t>
+            </a:r>
+            <a:endParaRPr lang="en-US" sz="950" dirty="0"/>
+          </a:p>
+        </p:txBody>
+      </p:sp>
+      <p:sp>
+        <p:nvSpPr>
+          <p:cNvPr id="36" name="Text 34"/>
+          <p:cNvSpPr/>
+          <p:nvPr/>
+        </p:nvSpPr>
+        <p:spPr>
+          <a:xfrm>
+            <a:off x="5897880" y="5312664"/>
+            <a:ext cx="5852160" cy="228600"/>
+          </a:xfrm>
+          <a:prstGeom prst="rect">
+            <a:avLst/>
+          </a:prstGeom>
+          <a:noFill/>
+          <a:ln/>
+        </p:spPr>
+        <p:txBody>
+          <a:bodyPr wrap="square" lIns="0" tIns="0" rIns="0" bIns="0" rtlCol="0" anchor="ctr"/>
+          <a:lstStyle/>
+          <a:p>
+            <a:pPr marL="0" indent="0">
+              <a:buNone/>
+            </a:pPr>
+            <a:r>
+              <a:rPr lang="en-US" sz="950" dirty="0">
+                <a:solidFill>
+                  <a:srgbClr val="E6EDF3"/>
+                </a:solidFill>
+                <a:latin typeface="Consolas" pitchFamily="34" charset="0"/>
+                <a:ea typeface="Consolas" pitchFamily="34" charset="-122"/>
+                <a:cs typeface="Consolas" pitchFamily="34" charset="-120"/>
+              </a:rPr>
+              <a:t>           f'출처 명시 필수.\n{context}')</a:t>
+            </a:r>
+            <a:endParaRPr lang="en-US" sz="950" dirty="0"/>
+          </a:p>
+        </p:txBody>
+      </p:sp>
+      <p:sp>
+        <p:nvSpPr>
+          <p:cNvPr id="37" name="Text 35"/>
+          <p:cNvSpPr/>
+          <p:nvPr/>
+        </p:nvSpPr>
+        <p:spPr>
+          <a:xfrm>
+            <a:off x="5897880" y="5559552"/>
+            <a:ext cx="5852160" cy="228600"/>
+          </a:xfrm>
+          <a:prstGeom prst="rect">
+            <a:avLst/>
+          </a:prstGeom>
+          <a:noFill/>
+          <a:ln/>
+        </p:spPr>
+        <p:txBody>
+          <a:bodyPr wrap="square" lIns="0" tIns="0" rIns="0" bIns="0" rtlCol="0" anchor="ctr"/>
+          <a:lstStyle/>
+          <a:p>
+            <a:pPr marL="0" indent="0">
+              <a:buNone/>
+            </a:pPr>
+            <a:r>
+              <a:rPr lang="en-US" sz="950" dirty="0">
+                <a:solidFill>
+                  <a:srgbClr val="10B981"/>
+                </a:solidFill>
+                <a:latin typeface="Consolas" pitchFamily="34" charset="0"/>
+                <a:ea typeface="Consolas" pitchFamily="34" charset="-122"/>
+                <a:cs typeface="Consolas" pitchFamily="34" charset="-120"/>
+              </a:rPr>
+              <a:t>    return ask(query, system=sys)</a:t>
+            </a:r>
+            <a:endParaRPr lang="en-US" sz="950" dirty="0"/>
+          </a:p>
+        </p:txBody>
+      </p:sp>
+      <p:sp>
+        <p:nvSpPr>
+          <p:cNvPr id="38" name="Text 36"/>
+          <p:cNvSpPr/>
+          <p:nvPr/>
+        </p:nvSpPr>
+        <p:spPr>
+          <a:xfrm>
+            <a:off x="5897880" y="5806440"/>
+            <a:ext cx="5852160" cy="228600"/>
+          </a:xfrm>
+          <a:prstGeom prst="rect">
+            <a:avLst/>
+          </a:prstGeom>
+          <a:noFill/>
+          <a:ln/>
+        </p:spPr>
+        <p:txBody>
+          <a:bodyPr wrap="square" lIns="0" tIns="0" rIns="0" bIns="0" rtlCol="0" anchor="ctr"/>
+          <a:lstStyle/>
+          <a:p>
+            <a:pPr marL="0" indent="0">
+              <a:buNone/>
+            </a:pPr>
+            <a:endParaRPr lang="en-US" sz="950" dirty="0"/>
+          </a:p>
+        </p:txBody>
+      </p:sp>
+      <p:sp>
+        <p:nvSpPr>
+          <p:cNvPr id="39" name="Text 37"/>
+          <p:cNvSpPr/>
+          <p:nvPr/>
+        </p:nvSpPr>
+        <p:spPr>
+          <a:xfrm>
+            <a:off x="5897880" y="6053328"/>
+            <a:ext cx="5852160" cy="228600"/>
+          </a:xfrm>
+          <a:prstGeom prst="rect">
+            <a:avLst/>
+          </a:prstGeom>
+          <a:noFill/>
+          <a:ln/>
+        </p:spPr>
+        <p:txBody>
+          <a:bodyPr wrap="square" lIns="0" tIns="0" rIns="0" bIns="0" rtlCol="0" anchor="ctr"/>
+          <a:lstStyle/>
+          <a:p>
+            <a:pPr marL="0" indent="0">
+              <a:buNone/>
+            </a:pPr>
+            <a:r>
+              <a:rPr lang="en-US" sz="950" dirty="0">
+                <a:solidFill>
+                  <a:srgbClr val="10B981"/>
+                </a:solidFill>
+                <a:latin typeface="Consolas" pitchFamily="34" charset="0"/>
+                <a:ea typeface="Consolas" pitchFamily="34" charset="-122"/>
+                <a:cs typeface="Consolas" pitchFamily="34" charset="-120"/>
+              </a:rPr>
+              <a:t>print(rag_ask(ATTACK_B))   # 거부 확인</a:t>
+            </a:r>
+            <a:endParaRPr lang="en-US" sz="950" dirty="0"/>
+          </a:p>
+        </p:txBody>
+      </p:sp>
+      <p:sp>
+        <p:nvSpPr>
+          <p:cNvPr id="40" name="Text 38"/>
+          <p:cNvSpPr/>
+          <p:nvPr/>
+        </p:nvSpPr>
+        <p:spPr>
+          <a:xfrm>
+            <a:off x="11064240" y="6510528"/>
+            <a:ext cx="914400" cy="274320"/>
+          </a:xfrm>
+          <a:prstGeom prst="rect">
+            <a:avLst/>
+          </a:prstGeom>
+          <a:noFill/>
+          <a:ln/>
+        </p:spPr>
+        <p:txBody>
+          <a:bodyPr wrap="square" lIns="0" tIns="0" rIns="0" bIns="0" rtlCol="0" anchor="ctr"/>
+          <a:lstStyle/>
+          <a:p>
+            <a:pPr marL="0" indent="0" algn="r">
+              <a:buNone/>
+            </a:pPr>
+            <a:r>
+              <a:rPr lang="en-US" sz="900" dirty="0">
+                <a:solidFill>
+                  <a:srgbClr val="94A3B8"/>
+                </a:solidFill>
+                <a:latin typeface="Arial" pitchFamily="34" charset="0"/>
+                <a:ea typeface="Arial" pitchFamily="34" charset="-122"/>
+                <a:cs typeface="Arial" pitchFamily="34" charset="-120"/>
+              </a:rPr>
+              <a:t>9 / 18</a:t>
+            </a:r>
+            <a:endParaRPr lang="en-US" sz="900" dirty="0"/>
+          </a:p>
+        </p:txBody>
+      </p:sp>
+    </p:spTree>
+  </p:cSld>
+  <p:clrMapOvr>
+    <a:masterClrMapping/>
+  </p:clrMapOvr>
+</p:sld>
+</file>
+
+<file path=ppt/slides/slide11.xml><?xml version="1.0" encoding="utf-8"?>
 <p:sld xmlns:a="http://schemas.openxmlformats.org/drawingml/2006/main" xmlns:r="http://schemas.openxmlformats.org/officeDocument/2006/relationships" xmlns:p="http://schemas.openxmlformats.org/presentationml/2006/main">
   <p:cSld name="Slide 12">
     <p:bg>
@@ -10072,7 +11539,7 @@
 </p:sld>
 </file>
 
-<file path=ppt/slides/slide11.xml><?xml version="1.0" encoding="utf-8"?>
+<file path=ppt/slides/slide12.xml><?xml version="1.0" encoding="utf-8"?>
 <p:sld xmlns:a="http://schemas.openxmlformats.org/drawingml/2006/main" xmlns:r="http://schemas.openxmlformats.org/officeDocument/2006/relationships" xmlns:p="http://schemas.openxmlformats.org/presentationml/2006/main">
   <p:cSld name="Slide 13">
     <p:bg>
@@ -11523,7 +12990,7 @@
 </p:sld>
 </file>
 
-<file path=ppt/slides/slide12.xml><?xml version="1.0" encoding="utf-8"?>
+<file path=ppt/slides/slide13.xml><?xml version="1.0" encoding="utf-8"?>
 <p:sld xmlns:a="http://schemas.openxmlformats.org/drawingml/2006/main" xmlns:r="http://schemas.openxmlformats.org/officeDocument/2006/relationships" xmlns:p="http://schemas.openxmlformats.org/presentationml/2006/main">
   <p:cSld name="Slide 14">
     <p:bg>
@@ -12946,7 +14413,7 @@
 </p:sld>
 </file>
 
-<file path=ppt/slides/slide13.xml><?xml version="1.0" encoding="utf-8"?>
+<file path=ppt/slides/slide14.xml><?xml version="1.0" encoding="utf-8"?>
 <p:sld xmlns:a="http://schemas.openxmlformats.org/drawingml/2006/main" xmlns:r="http://schemas.openxmlformats.org/officeDocument/2006/relationships" xmlns:p="http://schemas.openxmlformats.org/presentationml/2006/main">
   <p:cSld name="Slide 16">
     <p:bg>
@@ -13192,7 +14659,40 @@
                 <a:ea typeface="Arial" pitchFamily="34" charset="-122"/>
                 <a:cs typeface="Arial" pitchFamily="34" charset="-120"/>
               </a:rPr>
-              <a:t>📌 코드 실행 없이 웹 브라우저에서 진행 — API 호출 0회</a:t>
+              <a:t>📌 코드 실행 없이 웹 </a:t>
+            </a:r>
+            <a:r>
+              <a:rPr lang="en-US" sz="1100" b="1" dirty="0" err="1">
+                <a:solidFill>
+                  <a:srgbClr val="FFFFFF"/>
+                </a:solidFill>
+                <a:latin typeface="Arial" pitchFamily="34" charset="0"/>
+                <a:ea typeface="Arial" pitchFamily="34" charset="-122"/>
+                <a:cs typeface="Arial" pitchFamily="34" charset="-120"/>
+              </a:rPr>
+              <a:t>브라우저에서</a:t>
+            </a:r>
+            <a:r>
+              <a:rPr lang="en-US" sz="1100" b="1" dirty="0">
+                <a:solidFill>
+                  <a:srgbClr val="FFFFFF"/>
+                </a:solidFill>
+                <a:latin typeface="Arial" pitchFamily="34" charset="0"/>
+                <a:ea typeface="Arial" pitchFamily="34" charset="-122"/>
+                <a:cs typeface="Arial" pitchFamily="34" charset="-120"/>
+              </a:rPr>
+              <a:t> </a:t>
+            </a:r>
+            <a:r>
+              <a:rPr lang="en-US" sz="1100" b="1" dirty="0" err="1">
+                <a:solidFill>
+                  <a:srgbClr val="FFFFFF"/>
+                </a:solidFill>
+                <a:latin typeface="Arial" pitchFamily="34" charset="0"/>
+                <a:ea typeface="Arial" pitchFamily="34" charset="-122"/>
+                <a:cs typeface="Arial" pitchFamily="34" charset="-120"/>
+              </a:rPr>
+              <a:t>진행</a:t>
             </a:r>
             <a:endParaRPr lang="en-US" sz="1100" dirty="0"/>
           </a:p>
@@ -13966,7 +15466,7 @@
 </p:sld>
 </file>
 
-<file path=ppt/slides/slide14.xml><?xml version="1.0" encoding="utf-8"?>
+<file path=ppt/slides/slide15.xml><?xml version="1.0" encoding="utf-8"?>
 <p:sld xmlns:a="http://schemas.openxmlformats.org/drawingml/2006/main" xmlns:r="http://schemas.openxmlformats.org/officeDocument/2006/relationships" xmlns:p="http://schemas.openxmlformats.org/presentationml/2006/main">
   <p:cSld name="Slide 17">
     <p:bg>
@@ -15573,7 +17073,1126 @@
 </p:sld>
 </file>
 
-<file path=ppt/slides/slide15.xml><?xml version="1.0" encoding="utf-8"?>
+<file path=ppt/slides/slide16.xml><?xml version="1.0" encoding="utf-8"?>
+<p:sld xmlns:a="http://schemas.openxmlformats.org/drawingml/2006/main" xmlns:r="http://schemas.openxmlformats.org/officeDocument/2006/relationships" xmlns:p="http://schemas.openxmlformats.org/presentationml/2006/main">
+  <p:cSld>
+    <p:bg>
+      <p:bgPr>
+        <a:solidFill>
+          <a:srgbClr val="111848"/>
+        </a:solidFill>
+        <a:effectLst/>
+      </p:bgPr>
+    </p:bg>
+    <p:spTree>
+      <p:nvGrpSpPr>
+        <p:cNvPr id="1" name=""/>
+        <p:cNvGrpSpPr/>
+        <p:nvPr/>
+      </p:nvGrpSpPr>
+      <p:grpSpPr>
+        <a:xfrm>
+          <a:off x="0" y="0"/>
+          <a:ext cx="0" cy="0"/>
+          <a:chOff x="0" y="0"/>
+          <a:chExt cx="0" cy="0"/>
+        </a:xfrm>
+      </p:grpSpPr>
+      <p:sp>
+        <p:nvSpPr>
+          <p:cNvPr id="2" name="Rectangle 1"/>
+          <p:cNvSpPr/>
+          <p:nvPr/>
+        </p:nvSpPr>
+        <p:spPr>
+          <a:xfrm>
+            <a:off x="0" y="0"/>
+            <a:ext cx="12192000" cy="73152"/>
+          </a:xfrm>
+          <a:prstGeom prst="rect">
+            <a:avLst/>
+          </a:prstGeom>
+          <a:solidFill>
+            <a:srgbClr val="EF4444"/>
+          </a:solidFill>
+          <a:ln>
+            <a:noFill/>
+          </a:ln>
+        </p:spPr>
+        <p:style>
+          <a:lnRef idx="1">
+            <a:schemeClr val="accent1"/>
+          </a:lnRef>
+          <a:fillRef idx="3">
+            <a:schemeClr val="accent1"/>
+          </a:fillRef>
+          <a:effectRef idx="2">
+            <a:schemeClr val="accent1"/>
+          </a:effectRef>
+          <a:fontRef idx="minor">
+            <a:schemeClr val="lt1"/>
+          </a:fontRef>
+        </p:style>
+        <p:txBody>
+          <a:bodyPr wrap="square" lIns="60960" tIns="30480" rIns="60960" bIns="30480" rtlCol="0" anchor="ctr">
+            <a:noAutofit/>
+          </a:bodyPr>
+          <a:lstStyle/>
+          <a:p>
+            <a:pPr algn="ctr">
+              <a:defRPr/>
+            </a:pPr>
+            <a:endParaRPr/>
+          </a:p>
+        </p:txBody>
+      </p:sp>
+      <p:sp>
+        <p:nvSpPr>
+          <p:cNvPr id="3" name="TextBox 2"/>
+          <p:cNvSpPr txBox="1"/>
+          <p:nvPr/>
+        </p:nvSpPr>
+        <p:spPr>
+          <a:xfrm>
+            <a:off x="0" y="182880"/>
+            <a:ext cx="12192000" cy="548640"/>
+          </a:xfrm>
+          <a:prstGeom prst="rect">
+            <a:avLst/>
+          </a:prstGeom>
+          <a:noFill/>
+          <a:ln/>
+        </p:spPr>
+        <p:txBody>
+          <a:bodyPr wrap="square" lIns="60960" tIns="30480" rIns="60960" bIns="30480">
+            <a:noAutofit/>
+          </a:bodyPr>
+          <a:lstStyle/>
+          <a:p>
+            <a:pPr algn="ctr">
+              <a:defRPr/>
+            </a:pPr>
+            <a:r>
+              <a:rPr sz="2266" b="1">
+                <a:solidFill>
+                  <a:srgbClr val="FFFFFF"/>
+                </a:solidFill>
+                <a:latin typeface="Calibri"/>
+              </a:rPr>
+              <a:t>⚔  자유 공격·방어 시간  —  슬롯 4</a:t>
+            </a:r>
+          </a:p>
+        </p:txBody>
+      </p:sp>
+      <p:sp>
+        <p:nvSpPr>
+          <p:cNvPr id="4" name="TextBox 3"/>
+          <p:cNvSpPr txBox="1"/>
+          <p:nvPr/>
+        </p:nvSpPr>
+        <p:spPr>
+          <a:xfrm>
+            <a:off x="0" y="731520"/>
+            <a:ext cx="12192000" cy="365760"/>
+          </a:xfrm>
+          <a:prstGeom prst="rect">
+            <a:avLst/>
+          </a:prstGeom>
+          <a:noFill/>
+          <a:ln/>
+        </p:spPr>
+        <p:txBody>
+          <a:bodyPr wrap="square" lIns="60960" tIns="30480" rIns="60960" bIns="30480">
+            <a:noAutofit/>
+          </a:bodyPr>
+          <a:lstStyle/>
+          <a:p>
+            <a:pPr algn="ctr">
+              <a:defRPr/>
+            </a:pPr>
+            <a:r>
+              <a:rPr sz="1466" b="0">
+                <a:solidFill>
+                  <a:srgbClr val="06B6D4"/>
+                </a:solidFill>
+                <a:latin typeface="Calibri"/>
+              </a:rPr>
+              <a:t>벡터DB 오염 · 환각 유발 · 임베딩 역추출 — 나만의 공격·방어 시도</a:t>
+            </a:r>
+          </a:p>
+        </p:txBody>
+      </p:sp>
+      <p:sp>
+        <p:nvSpPr>
+          <p:cNvPr id="7" name="TextBox 6"/>
+          <p:cNvSpPr txBox="1"/>
+          <p:nvPr/>
+        </p:nvSpPr>
+        <p:spPr>
+          <a:xfrm>
+            <a:off x="487680" y="1341120"/>
+            <a:ext cx="1828800" cy="365760"/>
+          </a:xfrm>
+          <a:prstGeom prst="rect">
+            <a:avLst/>
+          </a:prstGeom>
+          <a:noFill/>
+          <a:ln/>
+        </p:spPr>
+        <p:txBody>
+          <a:bodyPr wrap="square" lIns="60960" tIns="30480" rIns="60960" bIns="30480">
+            <a:noAutofit/>
+          </a:bodyPr>
+          <a:lstStyle/>
+          <a:p>
+            <a:pPr algn="l">
+              <a:defRPr/>
+            </a:pPr>
+            <a:r>
+              <a:rPr sz="1466" b="1">
+                <a:solidFill>
+                  <a:srgbClr val="F59E0B"/>
+                </a:solidFill>
+                <a:latin typeface="Calibri"/>
+              </a:rPr>
+              <a:t>🎯 미션</a:t>
+            </a:r>
+          </a:p>
+        </p:txBody>
+      </p:sp>
+      <p:sp>
+        <p:nvSpPr>
+          <p:cNvPr id="8" name="Rectangle 7"/>
+          <p:cNvSpPr/>
+          <p:nvPr/>
+        </p:nvSpPr>
+        <p:spPr>
+          <a:xfrm>
+            <a:off x="487680" y="1828800"/>
+            <a:ext cx="11216640" cy="701040"/>
+          </a:xfrm>
+          <a:prstGeom prst="rect">
+            <a:avLst/>
+          </a:prstGeom>
+          <a:solidFill>
+            <a:srgbClr val="1C235A"/>
+          </a:solidFill>
+          <a:ln>
+            <a:noFill/>
+          </a:ln>
+        </p:spPr>
+        <p:style>
+          <a:lnRef idx="1">
+            <a:schemeClr val="accent1"/>
+          </a:lnRef>
+          <a:fillRef idx="3">
+            <a:schemeClr val="accent1"/>
+          </a:fillRef>
+          <a:effectRef idx="2">
+            <a:schemeClr val="accent1"/>
+          </a:effectRef>
+          <a:fontRef idx="minor">
+            <a:schemeClr val="lt1"/>
+          </a:fontRef>
+        </p:style>
+        <p:txBody>
+          <a:bodyPr wrap="square" lIns="60960" tIns="30480" rIns="60960" bIns="30480" rtlCol="0" anchor="ctr">
+            <a:noAutofit/>
+          </a:bodyPr>
+          <a:lstStyle/>
+          <a:p>
+            <a:pPr algn="ctr">
+              <a:defRPr/>
+            </a:pPr>
+            <a:endParaRPr/>
+          </a:p>
+        </p:txBody>
+      </p:sp>
+      <p:sp>
+        <p:nvSpPr>
+          <p:cNvPr id="9" name="Rectangle 8"/>
+          <p:cNvSpPr/>
+          <p:nvPr/>
+        </p:nvSpPr>
+        <p:spPr>
+          <a:xfrm>
+            <a:off x="579120" y="1981200"/>
+            <a:ext cx="396240" cy="396240"/>
+          </a:xfrm>
+          <a:prstGeom prst="rect">
+            <a:avLst/>
+          </a:prstGeom>
+          <a:solidFill>
+            <a:srgbClr val="06B6D4"/>
+          </a:solidFill>
+          <a:ln>
+            <a:noFill/>
+          </a:ln>
+        </p:spPr>
+        <p:style>
+          <a:lnRef idx="1">
+            <a:schemeClr val="accent1"/>
+          </a:lnRef>
+          <a:fillRef idx="3">
+            <a:schemeClr val="accent1"/>
+          </a:fillRef>
+          <a:effectRef idx="2">
+            <a:schemeClr val="accent1"/>
+          </a:effectRef>
+          <a:fontRef idx="minor">
+            <a:schemeClr val="lt1"/>
+          </a:fontRef>
+        </p:style>
+        <p:txBody>
+          <a:bodyPr wrap="square" lIns="60960" tIns="30480" rIns="60960" bIns="30480" rtlCol="0" anchor="ctr">
+            <a:noAutofit/>
+          </a:bodyPr>
+          <a:lstStyle/>
+          <a:p>
+            <a:pPr algn="ctr">
+              <a:defRPr/>
+            </a:pPr>
+            <a:endParaRPr/>
+          </a:p>
+        </p:txBody>
+      </p:sp>
+      <p:sp>
+        <p:nvSpPr>
+          <p:cNvPr id="10" name="TextBox 9"/>
+          <p:cNvSpPr txBox="1"/>
+          <p:nvPr/>
+        </p:nvSpPr>
+        <p:spPr>
+          <a:xfrm>
+            <a:off x="579120" y="1981200"/>
+            <a:ext cx="396240" cy="396240"/>
+          </a:xfrm>
+          <a:prstGeom prst="rect">
+            <a:avLst/>
+          </a:prstGeom>
+          <a:noFill/>
+          <a:ln/>
+        </p:spPr>
+        <p:txBody>
+          <a:bodyPr wrap="square" lIns="60960" tIns="30480" rIns="60960" bIns="30480">
+            <a:noAutofit/>
+          </a:bodyPr>
+          <a:lstStyle/>
+          <a:p>
+            <a:pPr algn="ctr">
+              <a:defRPr/>
+            </a:pPr>
+            <a:r>
+              <a:rPr sz="1333" b="1">
+                <a:solidFill>
+                  <a:srgbClr val="111848"/>
+                </a:solidFill>
+                <a:latin typeface="Calibri"/>
+              </a:rPr>
+              <a:t>1</a:t>
+            </a:r>
+          </a:p>
+        </p:txBody>
+      </p:sp>
+      <p:sp>
+        <p:nvSpPr>
+          <p:cNvPr id="11" name="TextBox 10"/>
+          <p:cNvSpPr txBox="1"/>
+          <p:nvPr/>
+        </p:nvSpPr>
+        <p:spPr>
+          <a:xfrm>
+            <a:off x="1097280" y="1889760"/>
+            <a:ext cx="10363200" cy="579120"/>
+          </a:xfrm>
+          <a:prstGeom prst="rect">
+            <a:avLst/>
+          </a:prstGeom>
+          <a:noFill/>
+          <a:ln/>
+        </p:spPr>
+        <p:txBody>
+          <a:bodyPr wrap="square" lIns="60960" tIns="30480" rIns="60960" bIns="30480" anchor="ctr">
+            <a:noAutofit/>
+          </a:bodyPr>
+          <a:lstStyle/>
+          <a:p>
+            <a:pPr algn="l">
+              <a:defRPr/>
+            </a:pPr>
+            <a:r>
+              <a:rPr sz="1333" b="0" dirty="0">
+                <a:solidFill>
+                  <a:srgbClr val="FFFFFF"/>
+                </a:solidFill>
+                <a:latin typeface="Calibri"/>
+              </a:rPr>
+              <a:t>FAISS </a:t>
+            </a:r>
+            <a:r>
+              <a:rPr sz="1333" b="0" dirty="0" err="1">
+                <a:solidFill>
+                  <a:srgbClr val="FFFFFF"/>
+                </a:solidFill>
+                <a:latin typeface="Calibri"/>
+              </a:rPr>
+              <a:t>DB에</a:t>
+            </a:r>
+            <a:r>
+              <a:rPr sz="1333" b="0" dirty="0">
+                <a:solidFill>
+                  <a:srgbClr val="FFFFFF"/>
+                </a:solidFill>
+                <a:latin typeface="Calibri"/>
+              </a:rPr>
+              <a:t> </a:t>
+            </a:r>
+            <a:r>
+              <a:rPr sz="1333" b="0" dirty="0" err="1">
+                <a:solidFill>
+                  <a:srgbClr val="FFFFFF"/>
+                </a:solidFill>
+                <a:latin typeface="Calibri"/>
+              </a:rPr>
+              <a:t>오염</a:t>
+            </a:r>
+            <a:r>
+              <a:rPr sz="1333" b="0" dirty="0">
+                <a:solidFill>
+                  <a:srgbClr val="FFFFFF"/>
+                </a:solidFill>
+                <a:latin typeface="Calibri"/>
+              </a:rPr>
+              <a:t> </a:t>
+            </a:r>
+            <a:r>
+              <a:rPr sz="1333" b="0" dirty="0" err="1">
+                <a:solidFill>
+                  <a:srgbClr val="FFFFFF"/>
+                </a:solidFill>
+                <a:latin typeface="Calibri"/>
+              </a:rPr>
+              <a:t>문서를</a:t>
+            </a:r>
+            <a:r>
+              <a:rPr sz="1333" b="0" dirty="0">
+                <a:solidFill>
+                  <a:srgbClr val="FFFFFF"/>
+                </a:solidFill>
+                <a:latin typeface="Calibri"/>
+              </a:rPr>
+              <a:t> </a:t>
+            </a:r>
+            <a:r>
+              <a:rPr sz="1333" b="0" dirty="0" err="1">
+                <a:solidFill>
+                  <a:srgbClr val="FFFFFF"/>
+                </a:solidFill>
+                <a:latin typeface="Calibri"/>
+              </a:rPr>
+              <a:t>직접</a:t>
+            </a:r>
+            <a:r>
+              <a:rPr sz="1333" b="0" dirty="0">
+                <a:solidFill>
+                  <a:srgbClr val="FFFFFF"/>
+                </a:solidFill>
+                <a:latin typeface="Calibri"/>
+              </a:rPr>
+              <a:t> </a:t>
+            </a:r>
+            <a:r>
+              <a:rPr sz="1333" b="0" dirty="0" err="1">
+                <a:solidFill>
+                  <a:srgbClr val="FFFFFF"/>
+                </a:solidFill>
+                <a:latin typeface="Calibri"/>
+              </a:rPr>
+              <a:t>작성해</a:t>
+            </a:r>
+            <a:r>
+              <a:rPr sz="1333" b="0" dirty="0">
+                <a:solidFill>
+                  <a:srgbClr val="FFFFFF"/>
+                </a:solidFill>
+                <a:latin typeface="Calibri"/>
+              </a:rPr>
+              <a:t> </a:t>
+            </a:r>
+            <a:r>
+              <a:rPr sz="1333" b="0" dirty="0" err="1">
+                <a:solidFill>
+                  <a:srgbClr val="FFFFFF"/>
+                </a:solidFill>
+                <a:latin typeface="Calibri"/>
+              </a:rPr>
+              <a:t>삽입하고</a:t>
+            </a:r>
+            <a:r>
+              <a:rPr sz="1333" b="0" dirty="0">
+                <a:solidFill>
+                  <a:srgbClr val="FFFFFF"/>
+                </a:solidFill>
+                <a:latin typeface="Calibri"/>
+              </a:rPr>
+              <a:t>, RAG </a:t>
+            </a:r>
+            <a:r>
+              <a:rPr sz="1333" b="0" dirty="0" err="1">
+                <a:solidFill>
+                  <a:srgbClr val="FFFFFF"/>
+                </a:solidFill>
+                <a:latin typeface="Calibri"/>
+              </a:rPr>
+              <a:t>검색</a:t>
+            </a:r>
+            <a:r>
+              <a:rPr sz="1333" b="0" dirty="0">
+                <a:solidFill>
+                  <a:srgbClr val="FFFFFF"/>
+                </a:solidFill>
+                <a:latin typeface="Calibri"/>
+              </a:rPr>
+              <a:t> </a:t>
+            </a:r>
+            <a:r>
+              <a:rPr sz="1333" b="0" dirty="0" err="1">
+                <a:solidFill>
+                  <a:srgbClr val="FFFFFF"/>
+                </a:solidFill>
+                <a:latin typeface="Calibri"/>
+              </a:rPr>
+              <a:t>결과가</a:t>
+            </a:r>
+            <a:r>
+              <a:rPr sz="1333" b="0" dirty="0">
+                <a:solidFill>
+                  <a:srgbClr val="FFFFFF"/>
+                </a:solidFill>
+                <a:latin typeface="Calibri"/>
+              </a:rPr>
+              <a:t> </a:t>
+            </a:r>
+            <a:r>
+              <a:rPr sz="1333" b="0" dirty="0" err="1">
+                <a:solidFill>
+                  <a:srgbClr val="FFFFFF"/>
+                </a:solidFill>
+                <a:latin typeface="Calibri"/>
+              </a:rPr>
+              <a:t>어떻게</a:t>
+            </a:r>
+            <a:r>
+              <a:rPr sz="1333" b="0" dirty="0">
+                <a:solidFill>
+                  <a:srgbClr val="FFFFFF"/>
+                </a:solidFill>
+                <a:latin typeface="Calibri"/>
+              </a:rPr>
+              <a:t> </a:t>
+            </a:r>
+            <a:r>
+              <a:rPr sz="1333" b="0" dirty="0" err="1">
+                <a:solidFill>
+                  <a:srgbClr val="FFFFFF"/>
+                </a:solidFill>
+                <a:latin typeface="Calibri"/>
+              </a:rPr>
+              <a:t>오염되는지</a:t>
+            </a:r>
+            <a:r>
+              <a:rPr sz="1333" b="0" dirty="0">
+                <a:solidFill>
+                  <a:srgbClr val="FFFFFF"/>
+                </a:solidFill>
+                <a:latin typeface="Calibri"/>
+              </a:rPr>
+              <a:t> </a:t>
+            </a:r>
+            <a:r>
+              <a:rPr sz="1333" b="0" dirty="0" err="1">
+                <a:solidFill>
+                  <a:srgbClr val="FFFFFF"/>
+                </a:solidFill>
+                <a:latin typeface="Calibri"/>
+              </a:rPr>
+              <a:t>확인하세요</a:t>
+            </a:r>
+            <a:r>
+              <a:rPr sz="1333" b="0" dirty="0">
+                <a:solidFill>
+                  <a:srgbClr val="FFFFFF"/>
+                </a:solidFill>
+                <a:latin typeface="Calibri"/>
+              </a:rPr>
+              <a:t>.</a:t>
+            </a:r>
+          </a:p>
+        </p:txBody>
+      </p:sp>
+      <p:sp>
+        <p:nvSpPr>
+          <p:cNvPr id="12" name="Rectangle 11"/>
+          <p:cNvSpPr/>
+          <p:nvPr/>
+        </p:nvSpPr>
+        <p:spPr>
+          <a:xfrm>
+            <a:off x="487680" y="2651759"/>
+            <a:ext cx="11216640" cy="701040"/>
+          </a:xfrm>
+          <a:prstGeom prst="rect">
+            <a:avLst/>
+          </a:prstGeom>
+          <a:solidFill>
+            <a:srgbClr val="1C235A"/>
+          </a:solidFill>
+          <a:ln>
+            <a:noFill/>
+          </a:ln>
+        </p:spPr>
+        <p:style>
+          <a:lnRef idx="1">
+            <a:schemeClr val="accent1"/>
+          </a:lnRef>
+          <a:fillRef idx="3">
+            <a:schemeClr val="accent1"/>
+          </a:fillRef>
+          <a:effectRef idx="2">
+            <a:schemeClr val="accent1"/>
+          </a:effectRef>
+          <a:fontRef idx="minor">
+            <a:schemeClr val="lt1"/>
+          </a:fontRef>
+        </p:style>
+        <p:txBody>
+          <a:bodyPr wrap="square" lIns="60960" tIns="30480" rIns="60960" bIns="30480" rtlCol="0" anchor="ctr">
+            <a:noAutofit/>
+          </a:bodyPr>
+          <a:lstStyle/>
+          <a:p>
+            <a:pPr algn="ctr">
+              <a:defRPr/>
+            </a:pPr>
+            <a:endParaRPr/>
+          </a:p>
+        </p:txBody>
+      </p:sp>
+      <p:sp>
+        <p:nvSpPr>
+          <p:cNvPr id="13" name="Rectangle 12"/>
+          <p:cNvSpPr/>
+          <p:nvPr/>
+        </p:nvSpPr>
+        <p:spPr>
+          <a:xfrm>
+            <a:off x="579120" y="2804160"/>
+            <a:ext cx="396240" cy="396240"/>
+          </a:xfrm>
+          <a:prstGeom prst="rect">
+            <a:avLst/>
+          </a:prstGeom>
+          <a:solidFill>
+            <a:srgbClr val="06B6D4"/>
+          </a:solidFill>
+          <a:ln>
+            <a:noFill/>
+          </a:ln>
+        </p:spPr>
+        <p:style>
+          <a:lnRef idx="1">
+            <a:schemeClr val="accent1"/>
+          </a:lnRef>
+          <a:fillRef idx="3">
+            <a:schemeClr val="accent1"/>
+          </a:fillRef>
+          <a:effectRef idx="2">
+            <a:schemeClr val="accent1"/>
+          </a:effectRef>
+          <a:fontRef idx="minor">
+            <a:schemeClr val="lt1"/>
+          </a:fontRef>
+        </p:style>
+        <p:txBody>
+          <a:bodyPr wrap="square" lIns="60960" tIns="30480" rIns="60960" bIns="30480" rtlCol="0" anchor="ctr">
+            <a:noAutofit/>
+          </a:bodyPr>
+          <a:lstStyle/>
+          <a:p>
+            <a:pPr algn="ctr">
+              <a:defRPr/>
+            </a:pPr>
+            <a:endParaRPr/>
+          </a:p>
+        </p:txBody>
+      </p:sp>
+      <p:sp>
+        <p:nvSpPr>
+          <p:cNvPr id="14" name="TextBox 13"/>
+          <p:cNvSpPr txBox="1"/>
+          <p:nvPr/>
+        </p:nvSpPr>
+        <p:spPr>
+          <a:xfrm>
+            <a:off x="579120" y="2804160"/>
+            <a:ext cx="396240" cy="396240"/>
+          </a:xfrm>
+          <a:prstGeom prst="rect">
+            <a:avLst/>
+          </a:prstGeom>
+          <a:noFill/>
+          <a:ln/>
+        </p:spPr>
+        <p:txBody>
+          <a:bodyPr wrap="square" lIns="60960" tIns="30480" rIns="60960" bIns="30480">
+            <a:noAutofit/>
+          </a:bodyPr>
+          <a:lstStyle/>
+          <a:p>
+            <a:pPr algn="ctr">
+              <a:defRPr/>
+            </a:pPr>
+            <a:r>
+              <a:rPr sz="1333" b="1">
+                <a:solidFill>
+                  <a:srgbClr val="111848"/>
+                </a:solidFill>
+                <a:latin typeface="Calibri"/>
+              </a:rPr>
+              <a:t>2</a:t>
+            </a:r>
+          </a:p>
+        </p:txBody>
+      </p:sp>
+      <p:sp>
+        <p:nvSpPr>
+          <p:cNvPr id="15" name="TextBox 14"/>
+          <p:cNvSpPr txBox="1"/>
+          <p:nvPr/>
+        </p:nvSpPr>
+        <p:spPr>
+          <a:xfrm>
+            <a:off x="1097280" y="2712719"/>
+            <a:ext cx="10363200" cy="579120"/>
+          </a:xfrm>
+          <a:prstGeom prst="rect">
+            <a:avLst/>
+          </a:prstGeom>
+          <a:noFill/>
+          <a:ln/>
+        </p:spPr>
+        <p:txBody>
+          <a:bodyPr wrap="square" lIns="60960" tIns="30480" rIns="60960" bIns="30480" anchor="ctr">
+            <a:noAutofit/>
+          </a:bodyPr>
+          <a:lstStyle/>
+          <a:p>
+            <a:pPr algn="l">
+              <a:defRPr/>
+            </a:pPr>
+            <a:r>
+              <a:rPr sz="1333" b="0">
+                <a:solidFill>
+                  <a:srgbClr val="FFFFFF"/>
+                </a:solidFill>
+                <a:latin typeface="Calibri"/>
+              </a:rPr>
+              <a:t>존재하지 않는 법령·규정을 전제로 질문해 환각을 유발하고, RAG로 억제되는지 확인하세요.</a:t>
+            </a:r>
+          </a:p>
+        </p:txBody>
+      </p:sp>
+      <p:sp>
+        <p:nvSpPr>
+          <p:cNvPr id="16" name="Rectangle 15"/>
+          <p:cNvSpPr/>
+          <p:nvPr/>
+        </p:nvSpPr>
+        <p:spPr>
+          <a:xfrm>
+            <a:off x="487680" y="3474720"/>
+            <a:ext cx="11216640" cy="701040"/>
+          </a:xfrm>
+          <a:prstGeom prst="rect">
+            <a:avLst/>
+          </a:prstGeom>
+          <a:solidFill>
+            <a:srgbClr val="1C235A"/>
+          </a:solidFill>
+          <a:ln>
+            <a:noFill/>
+          </a:ln>
+        </p:spPr>
+        <p:style>
+          <a:lnRef idx="1">
+            <a:schemeClr val="accent1"/>
+          </a:lnRef>
+          <a:fillRef idx="3">
+            <a:schemeClr val="accent1"/>
+          </a:fillRef>
+          <a:effectRef idx="2">
+            <a:schemeClr val="accent1"/>
+          </a:effectRef>
+          <a:fontRef idx="minor">
+            <a:schemeClr val="lt1"/>
+          </a:fontRef>
+        </p:style>
+        <p:txBody>
+          <a:bodyPr wrap="square" lIns="60960" tIns="30480" rIns="60960" bIns="30480" rtlCol="0" anchor="ctr">
+            <a:noAutofit/>
+          </a:bodyPr>
+          <a:lstStyle/>
+          <a:p>
+            <a:pPr algn="ctr">
+              <a:defRPr/>
+            </a:pPr>
+            <a:endParaRPr/>
+          </a:p>
+        </p:txBody>
+      </p:sp>
+      <p:sp>
+        <p:nvSpPr>
+          <p:cNvPr id="17" name="Rectangle 16"/>
+          <p:cNvSpPr/>
+          <p:nvPr/>
+        </p:nvSpPr>
+        <p:spPr>
+          <a:xfrm>
+            <a:off x="579120" y="3627120"/>
+            <a:ext cx="396240" cy="396240"/>
+          </a:xfrm>
+          <a:prstGeom prst="rect">
+            <a:avLst/>
+          </a:prstGeom>
+          <a:solidFill>
+            <a:srgbClr val="06B6D4"/>
+          </a:solidFill>
+          <a:ln>
+            <a:noFill/>
+          </a:ln>
+        </p:spPr>
+        <p:style>
+          <a:lnRef idx="1">
+            <a:schemeClr val="accent1"/>
+          </a:lnRef>
+          <a:fillRef idx="3">
+            <a:schemeClr val="accent1"/>
+          </a:fillRef>
+          <a:effectRef idx="2">
+            <a:schemeClr val="accent1"/>
+          </a:effectRef>
+          <a:fontRef idx="minor">
+            <a:schemeClr val="lt1"/>
+          </a:fontRef>
+        </p:style>
+        <p:txBody>
+          <a:bodyPr wrap="square" lIns="60960" tIns="30480" rIns="60960" bIns="30480" rtlCol="0" anchor="ctr">
+            <a:noAutofit/>
+          </a:bodyPr>
+          <a:lstStyle/>
+          <a:p>
+            <a:pPr algn="ctr">
+              <a:defRPr/>
+            </a:pPr>
+            <a:endParaRPr/>
+          </a:p>
+        </p:txBody>
+      </p:sp>
+      <p:sp>
+        <p:nvSpPr>
+          <p:cNvPr id="18" name="TextBox 17"/>
+          <p:cNvSpPr txBox="1"/>
+          <p:nvPr/>
+        </p:nvSpPr>
+        <p:spPr>
+          <a:xfrm>
+            <a:off x="579120" y="3627120"/>
+            <a:ext cx="396240" cy="396240"/>
+          </a:xfrm>
+          <a:prstGeom prst="rect">
+            <a:avLst/>
+          </a:prstGeom>
+          <a:noFill/>
+          <a:ln/>
+        </p:spPr>
+        <p:txBody>
+          <a:bodyPr wrap="square" lIns="60960" tIns="30480" rIns="60960" bIns="30480">
+            <a:noAutofit/>
+          </a:bodyPr>
+          <a:lstStyle/>
+          <a:p>
+            <a:pPr algn="ctr">
+              <a:defRPr/>
+            </a:pPr>
+            <a:r>
+              <a:rPr sz="1333" b="1">
+                <a:solidFill>
+                  <a:srgbClr val="111848"/>
+                </a:solidFill>
+                <a:latin typeface="Calibri"/>
+              </a:rPr>
+              <a:t>3</a:t>
+            </a:r>
+          </a:p>
+        </p:txBody>
+      </p:sp>
+      <p:sp>
+        <p:nvSpPr>
+          <p:cNvPr id="19" name="TextBox 18"/>
+          <p:cNvSpPr txBox="1"/>
+          <p:nvPr/>
+        </p:nvSpPr>
+        <p:spPr>
+          <a:xfrm>
+            <a:off x="1097280" y="3535680"/>
+            <a:ext cx="10363200" cy="579120"/>
+          </a:xfrm>
+          <a:prstGeom prst="rect">
+            <a:avLst/>
+          </a:prstGeom>
+          <a:noFill/>
+          <a:ln/>
+        </p:spPr>
+        <p:txBody>
+          <a:bodyPr wrap="square" lIns="60960" tIns="30480" rIns="60960" bIns="30480" anchor="ctr">
+            <a:noAutofit/>
+          </a:bodyPr>
+          <a:lstStyle/>
+          <a:p>
+            <a:pPr algn="l">
+              <a:defRPr/>
+            </a:pPr>
+            <a:r>
+              <a:rPr sz="1333" b="0">
+                <a:solidFill>
+                  <a:srgbClr val="FFFFFF"/>
+                </a:solidFill>
+                <a:latin typeface="Calibri"/>
+              </a:rPr>
+              <a:t>Jina AI 임베딩 역추출 데모(웹)에서 나만의 합성 데이터로 역추출을 시도하세요.</a:t>
+            </a:r>
+          </a:p>
+        </p:txBody>
+      </p:sp>
+      <p:sp>
+        <p:nvSpPr>
+          <p:cNvPr id="20" name="Rectangle 19"/>
+          <p:cNvSpPr/>
+          <p:nvPr/>
+        </p:nvSpPr>
+        <p:spPr>
+          <a:xfrm>
+            <a:off x="487680" y="4297680"/>
+            <a:ext cx="11216640" cy="701040"/>
+          </a:xfrm>
+          <a:prstGeom prst="rect">
+            <a:avLst/>
+          </a:prstGeom>
+          <a:solidFill>
+            <a:srgbClr val="1C235A"/>
+          </a:solidFill>
+          <a:ln>
+            <a:noFill/>
+          </a:ln>
+        </p:spPr>
+        <p:style>
+          <a:lnRef idx="1">
+            <a:schemeClr val="accent1"/>
+          </a:lnRef>
+          <a:fillRef idx="3">
+            <a:schemeClr val="accent1"/>
+          </a:fillRef>
+          <a:effectRef idx="2">
+            <a:schemeClr val="accent1"/>
+          </a:effectRef>
+          <a:fontRef idx="minor">
+            <a:schemeClr val="lt1"/>
+          </a:fontRef>
+        </p:style>
+        <p:txBody>
+          <a:bodyPr wrap="square" lIns="60960" tIns="30480" rIns="60960" bIns="30480" rtlCol="0" anchor="ctr">
+            <a:noAutofit/>
+          </a:bodyPr>
+          <a:lstStyle/>
+          <a:p>
+            <a:pPr algn="ctr">
+              <a:defRPr/>
+            </a:pPr>
+            <a:endParaRPr/>
+          </a:p>
+        </p:txBody>
+      </p:sp>
+      <p:sp>
+        <p:nvSpPr>
+          <p:cNvPr id="21" name="Rectangle 20"/>
+          <p:cNvSpPr/>
+          <p:nvPr/>
+        </p:nvSpPr>
+        <p:spPr>
+          <a:xfrm>
+            <a:off x="579120" y="4450080"/>
+            <a:ext cx="396240" cy="396240"/>
+          </a:xfrm>
+          <a:prstGeom prst="rect">
+            <a:avLst/>
+          </a:prstGeom>
+          <a:solidFill>
+            <a:srgbClr val="06B6D4"/>
+          </a:solidFill>
+          <a:ln>
+            <a:noFill/>
+          </a:ln>
+        </p:spPr>
+        <p:style>
+          <a:lnRef idx="1">
+            <a:schemeClr val="accent1"/>
+          </a:lnRef>
+          <a:fillRef idx="3">
+            <a:schemeClr val="accent1"/>
+          </a:fillRef>
+          <a:effectRef idx="2">
+            <a:schemeClr val="accent1"/>
+          </a:effectRef>
+          <a:fontRef idx="minor">
+            <a:schemeClr val="lt1"/>
+          </a:fontRef>
+        </p:style>
+        <p:txBody>
+          <a:bodyPr wrap="square" lIns="60960" tIns="30480" rIns="60960" bIns="30480" rtlCol="0" anchor="ctr">
+            <a:noAutofit/>
+          </a:bodyPr>
+          <a:lstStyle/>
+          <a:p>
+            <a:pPr algn="ctr">
+              <a:defRPr/>
+            </a:pPr>
+            <a:endParaRPr/>
+          </a:p>
+        </p:txBody>
+      </p:sp>
+      <p:sp>
+        <p:nvSpPr>
+          <p:cNvPr id="22" name="TextBox 21"/>
+          <p:cNvSpPr txBox="1"/>
+          <p:nvPr/>
+        </p:nvSpPr>
+        <p:spPr>
+          <a:xfrm>
+            <a:off x="579120" y="4450080"/>
+            <a:ext cx="396240" cy="396240"/>
+          </a:xfrm>
+          <a:prstGeom prst="rect">
+            <a:avLst/>
+          </a:prstGeom>
+          <a:noFill/>
+          <a:ln/>
+        </p:spPr>
+        <p:txBody>
+          <a:bodyPr wrap="square" lIns="60960" tIns="30480" rIns="60960" bIns="30480">
+            <a:noAutofit/>
+          </a:bodyPr>
+          <a:lstStyle/>
+          <a:p>
+            <a:pPr algn="ctr">
+              <a:defRPr/>
+            </a:pPr>
+            <a:r>
+              <a:rPr sz="1333" b="1">
+                <a:solidFill>
+                  <a:srgbClr val="111848"/>
+                </a:solidFill>
+                <a:latin typeface="Calibri"/>
+              </a:rPr>
+              <a:t>4</a:t>
+            </a:r>
+          </a:p>
+        </p:txBody>
+      </p:sp>
+      <p:sp>
+        <p:nvSpPr>
+          <p:cNvPr id="23" name="TextBox 22"/>
+          <p:cNvSpPr txBox="1"/>
+          <p:nvPr/>
+        </p:nvSpPr>
+        <p:spPr>
+          <a:xfrm>
+            <a:off x="1097280" y="4358640"/>
+            <a:ext cx="10363200" cy="579120"/>
+          </a:xfrm>
+          <a:prstGeom prst="rect">
+            <a:avLst/>
+          </a:prstGeom>
+          <a:noFill/>
+          <a:ln/>
+        </p:spPr>
+        <p:txBody>
+          <a:bodyPr wrap="square" lIns="60960" tIns="30480" rIns="60960" bIns="30480" anchor="ctr">
+            <a:noAutofit/>
+          </a:bodyPr>
+          <a:lstStyle/>
+          <a:p>
+            <a:pPr algn="l">
+              <a:defRPr/>
+            </a:pPr>
+            <a:r>
+              <a:rPr sz="1333" b="0">
+                <a:solidFill>
+                  <a:srgbClr val="FFFFFF"/>
+                </a:solidFill>
+                <a:latin typeface="Calibri"/>
+              </a:rPr>
+              <a:t>M03 &lt;DOC&gt; 태그 격리를 변형해 더 강한 오염 공격을 만들어보세요 — 막히면 방어를 강화하세요.</a:t>
+            </a:r>
+          </a:p>
+        </p:txBody>
+      </p:sp>
+      <p:sp>
+        <p:nvSpPr>
+          <p:cNvPr id="24" name="TextBox 23"/>
+          <p:cNvSpPr txBox="1"/>
+          <p:nvPr/>
+        </p:nvSpPr>
+        <p:spPr>
+          <a:xfrm>
+            <a:off x="0" y="5791200"/>
+            <a:ext cx="12192000" cy="365760"/>
+          </a:xfrm>
+          <a:prstGeom prst="rect">
+            <a:avLst/>
+          </a:prstGeom>
+          <a:noFill/>
+          <a:ln/>
+        </p:spPr>
+        <p:txBody>
+          <a:bodyPr wrap="square" lIns="60960" tIns="30480" rIns="60960" bIns="30480">
+            <a:noAutofit/>
+          </a:bodyPr>
+          <a:lstStyle/>
+          <a:p>
+            <a:pPr algn="ctr">
+              <a:defRPr/>
+            </a:pPr>
+            <a:r>
+              <a:rPr sz="1133" b="0">
+                <a:solidFill>
+                  <a:srgbClr val="F59E0B"/>
+                </a:solidFill>
+                <a:latin typeface="Calibri"/>
+              </a:rPr>
+              <a:t>⚠  합성(가상) 데이터만 사용  —  실제 개인정보·기밀정보 입력 절대 금지</a:t>
+            </a:r>
+          </a:p>
+        </p:txBody>
+      </p:sp>
+    </p:spTree>
+  </p:cSld>
+  <p:clrMapOvr>
+    <a:masterClrMapping/>
+  </p:clrMapOvr>
+</p:sld>
+</file>
+
+<file path=ppt/slides/slide17.xml><?xml version="1.0" encoding="utf-8"?>
 <p:sld xmlns:a="http://schemas.openxmlformats.org/drawingml/2006/main" xmlns:r="http://schemas.openxmlformats.org/officeDocument/2006/relationships" xmlns:p="http://schemas.openxmlformats.org/presentationml/2006/main">
   <p:cSld name="Slide 18">
     <p:bg>
@@ -18647,7 +21266,7 @@
 </p:sld>
 </file>
 
-<file path=ppt/slides/slide16.xml><?xml version="1.0" encoding="utf-8"?>
+<file path=ppt/slides/slide18.xml><?xml version="1.0" encoding="utf-8"?>
 <p:sld xmlns:a="http://schemas.openxmlformats.org/drawingml/2006/main" xmlns:r="http://schemas.openxmlformats.org/officeDocument/2006/relationships" xmlns:p="http://schemas.openxmlformats.org/presentationml/2006/main">
   <p:cSld>
     <p:bg>
@@ -18826,6 +21445,551 @@
 <file path=ppt/slides/slide2.xml><?xml version="1.0" encoding="utf-8"?>
 <p:sld xmlns:a="http://schemas.openxmlformats.org/drawingml/2006/main" xmlns:r="http://schemas.openxmlformats.org/officeDocument/2006/relationships" xmlns:p="http://schemas.openxmlformats.org/presentationml/2006/main">
   <p:cSld>
+    <p:bg>
+      <p:bgPr>
+        <a:solidFill>
+          <a:srgbClr val="F0F2F8"/>
+        </a:solidFill>
+        <a:effectLst/>
+      </p:bgPr>
+    </p:bg>
+    <p:spTree>
+      <p:nvGrpSpPr>
+        <p:cNvPr id="1" name=""/>
+        <p:cNvGrpSpPr/>
+        <p:nvPr/>
+      </p:nvGrpSpPr>
+      <p:grpSpPr>
+        <a:xfrm>
+          <a:off x="0" y="0"/>
+          <a:ext cx="0" cy="0"/>
+          <a:chOff x="0" y="0"/>
+          <a:chExt cx="0" cy="0"/>
+        </a:xfrm>
+      </p:grpSpPr>
+      <p:sp>
+        <p:nvSpPr>
+          <p:cNvPr id="2" name="Rectangle 1"/>
+          <p:cNvSpPr/>
+          <p:nvPr/>
+        </p:nvSpPr>
+        <p:spPr>
+          <a:xfrm>
+            <a:off x="0" y="0"/>
+            <a:ext cx="12192000" cy="670560"/>
+          </a:xfrm>
+          <a:prstGeom prst="rect">
+            <a:avLst/>
+          </a:prstGeom>
+          <a:solidFill>
+            <a:srgbClr val="111848"/>
+          </a:solidFill>
+          <a:ln>
+            <a:noFill/>
+          </a:ln>
+        </p:spPr>
+        <p:style>
+          <a:lnRef idx="1">
+            <a:schemeClr val="accent1"/>
+          </a:lnRef>
+          <a:fillRef idx="3">
+            <a:schemeClr val="accent1"/>
+          </a:fillRef>
+          <a:effectRef idx="2">
+            <a:schemeClr val="accent1"/>
+          </a:effectRef>
+          <a:fontRef idx="minor">
+            <a:schemeClr val="lt1"/>
+          </a:fontRef>
+        </p:style>
+        <p:txBody>
+          <a:bodyPr wrap="square" lIns="60960" tIns="30480" rIns="60960" bIns="30480" rtlCol="0" anchor="ctr">
+            <a:noAutofit/>
+          </a:bodyPr>
+          <a:lstStyle/>
+          <a:p>
+            <a:pPr algn="ctr">
+              <a:defRPr/>
+            </a:pPr>
+            <a:endParaRPr/>
+          </a:p>
+        </p:txBody>
+      </p:sp>
+      <p:sp>
+        <p:nvSpPr>
+          <p:cNvPr id="3" name="TextBox 2"/>
+          <p:cNvSpPr txBox="1"/>
+          <p:nvPr/>
+        </p:nvSpPr>
+        <p:spPr>
+          <a:xfrm>
+            <a:off x="304800" y="0"/>
+            <a:ext cx="11582400" cy="670560"/>
+          </a:xfrm>
+          <a:prstGeom prst="rect">
+            <a:avLst/>
+          </a:prstGeom>
+          <a:noFill/>
+          <a:ln/>
+        </p:spPr>
+        <p:txBody>
+          <a:bodyPr wrap="square" lIns="60960" tIns="30480" rIns="60960" bIns="30480">
+            <a:noAutofit/>
+          </a:bodyPr>
+          <a:lstStyle/>
+          <a:p>
+            <a:pPr algn="l">
+              <a:defRPr/>
+            </a:pPr>
+            <a:r>
+              <a:rPr sz="2000" b="1">
+                <a:solidFill>
+                  <a:srgbClr val="FFFFFF"/>
+                </a:solidFill>
+                <a:latin typeface="Calibri"/>
+              </a:rPr>
+              <a:t>슬롯 4 — 영상으로 보는 실제 사례</a:t>
+            </a:r>
+          </a:p>
+        </p:txBody>
+      </p:sp>
+      <p:sp>
+        <p:nvSpPr>
+          <p:cNvPr id="4" name="Rectangle 3"/>
+          <p:cNvSpPr/>
+          <p:nvPr/>
+        </p:nvSpPr>
+        <p:spPr>
+          <a:xfrm>
+            <a:off x="304800" y="853440"/>
+            <a:ext cx="3352800" cy="365760"/>
+          </a:xfrm>
+          <a:prstGeom prst="rect">
+            <a:avLst/>
+          </a:prstGeom>
+          <a:solidFill>
+            <a:srgbClr val="06B6D4"/>
+          </a:solidFill>
+          <a:ln>
+            <a:noFill/>
+          </a:ln>
+        </p:spPr>
+        <p:style>
+          <a:lnRef idx="1">
+            <a:schemeClr val="accent1"/>
+          </a:lnRef>
+          <a:fillRef idx="3">
+            <a:schemeClr val="accent1"/>
+          </a:fillRef>
+          <a:effectRef idx="2">
+            <a:schemeClr val="accent1"/>
+          </a:effectRef>
+          <a:fontRef idx="minor">
+            <a:schemeClr val="lt1"/>
+          </a:fontRef>
+        </p:style>
+        <p:txBody>
+          <a:bodyPr wrap="square" lIns="60960" tIns="30480" rIns="60960" bIns="30480" rtlCol="0" anchor="ctr">
+            <a:noAutofit/>
+          </a:bodyPr>
+          <a:lstStyle/>
+          <a:p>
+            <a:pPr algn="ctr">
+              <a:defRPr/>
+            </a:pPr>
+            <a:endParaRPr/>
+          </a:p>
+        </p:txBody>
+      </p:sp>
+      <p:sp>
+        <p:nvSpPr>
+          <p:cNvPr id="5" name="TextBox 4"/>
+          <p:cNvSpPr txBox="1"/>
+          <p:nvPr/>
+        </p:nvSpPr>
+        <p:spPr>
+          <a:xfrm>
+            <a:off x="304800" y="853440"/>
+            <a:ext cx="3352800" cy="365760"/>
+          </a:xfrm>
+          <a:prstGeom prst="rect">
+            <a:avLst/>
+          </a:prstGeom>
+          <a:noFill/>
+          <a:ln/>
+        </p:spPr>
+        <p:txBody>
+          <a:bodyPr wrap="square" lIns="60960" tIns="30480" rIns="60960" bIns="30480">
+            <a:noAutofit/>
+          </a:bodyPr>
+          <a:lstStyle/>
+          <a:p>
+            <a:pPr algn="ctr">
+              <a:defRPr/>
+            </a:pPr>
+            <a:r>
+              <a:rPr sz="1333" b="1">
+                <a:solidFill>
+                  <a:srgbClr val="FFFFFF"/>
+                </a:solidFill>
+                <a:latin typeface="Calibri"/>
+              </a:rPr>
+              <a:t>주제: RAG 환각 · 벡터DB 오염 실제 사례</a:t>
+            </a:r>
+          </a:p>
+        </p:txBody>
+      </p:sp>
+      <p:sp>
+        <p:nvSpPr>
+          <p:cNvPr id="6" name="Rectangle 5"/>
+          <p:cNvSpPr/>
+          <p:nvPr/>
+        </p:nvSpPr>
+        <p:spPr>
+          <a:xfrm>
+            <a:off x="609600" y="1402080"/>
+            <a:ext cx="6096000" cy="3657600"/>
+          </a:xfrm>
+          <a:prstGeom prst="rect">
+            <a:avLst/>
+          </a:prstGeom>
+          <a:solidFill>
+            <a:srgbClr val="1A1A1A"/>
+          </a:solidFill>
+          <a:ln w="16933">
+            <a:solidFill>
+              <a:srgbClr val="06B6D4"/>
+            </a:solidFill>
+          </a:ln>
+        </p:spPr>
+        <p:style>
+          <a:lnRef idx="1">
+            <a:schemeClr val="accent1"/>
+          </a:lnRef>
+          <a:fillRef idx="3">
+            <a:schemeClr val="accent1"/>
+          </a:fillRef>
+          <a:effectRef idx="2">
+            <a:schemeClr val="accent1"/>
+          </a:effectRef>
+          <a:fontRef idx="minor">
+            <a:schemeClr val="lt1"/>
+          </a:fontRef>
+        </p:style>
+        <p:txBody>
+          <a:bodyPr wrap="square" lIns="60960" tIns="30480" rIns="60960" bIns="30480" rtlCol="0" anchor="ctr">
+            <a:noAutofit/>
+          </a:bodyPr>
+          <a:lstStyle/>
+          <a:p>
+            <a:pPr algn="ctr">
+              <a:defRPr/>
+            </a:pPr>
+            <a:endParaRPr/>
+          </a:p>
+        </p:txBody>
+      </p:sp>
+      <p:sp>
+        <p:nvSpPr>
+          <p:cNvPr id="7" name="TextBox 6"/>
+          <p:cNvSpPr txBox="1"/>
+          <p:nvPr/>
+        </p:nvSpPr>
+        <p:spPr>
+          <a:xfrm>
+            <a:off x="304800" y="2926080"/>
+            <a:ext cx="6096000" cy="3657600"/>
+          </a:xfrm>
+          <a:prstGeom prst="rect">
+            <a:avLst/>
+          </a:prstGeom>
+          <a:noFill/>
+          <a:ln/>
+        </p:spPr>
+        <p:txBody>
+          <a:bodyPr wrap="square" lIns="60960" tIns="30480" rIns="60960" bIns="30480">
+            <a:noAutofit/>
+          </a:bodyPr>
+          <a:lstStyle/>
+          <a:p>
+            <a:pPr algn="ctr">
+              <a:defRPr/>
+            </a:pPr>
+            <a:r>
+              <a:rPr sz="5333" b="0" dirty="0">
+                <a:solidFill>
+                  <a:srgbClr val="06B6D4"/>
+                </a:solidFill>
+                <a:latin typeface="Calibri"/>
+              </a:rPr>
+              <a:t>▶</a:t>
+            </a:r>
+          </a:p>
+        </p:txBody>
+      </p:sp>
+      <p:sp>
+        <p:nvSpPr>
+          <p:cNvPr id="8" name="TextBox 7"/>
+          <p:cNvSpPr txBox="1"/>
+          <p:nvPr/>
+        </p:nvSpPr>
+        <p:spPr>
+          <a:xfrm>
+            <a:off x="609600" y="4511040"/>
+            <a:ext cx="6096000" cy="487680"/>
+          </a:xfrm>
+          <a:prstGeom prst="rect">
+            <a:avLst/>
+          </a:prstGeom>
+          <a:noFill/>
+          <a:ln/>
+        </p:spPr>
+        <p:txBody>
+          <a:bodyPr wrap="square" lIns="60960" tIns="30480" rIns="60960" bIns="30480">
+            <a:noAutofit/>
+          </a:bodyPr>
+          <a:lstStyle/>
+          <a:p>
+            <a:pPr algn="ctr">
+              <a:defRPr/>
+            </a:pPr>
+            <a:r>
+              <a:rPr sz="1066" b="0">
+                <a:solidFill>
+                  <a:srgbClr val="6B7280"/>
+                </a:solidFill>
+                <a:latin typeface="Calibri"/>
+              </a:rPr>
+              <a:t>에어 캐나다 챗봇 오판결 &amp; RAG poisoning 데모 (2024)</a:t>
+            </a:r>
+          </a:p>
+        </p:txBody>
+      </p:sp>
+      <p:sp>
+        <p:nvSpPr>
+          <p:cNvPr id="12" name="Rectangle 11"/>
+          <p:cNvSpPr/>
+          <p:nvPr/>
+        </p:nvSpPr>
+        <p:spPr>
+          <a:xfrm>
+            <a:off x="7315200" y="3108960"/>
+            <a:ext cx="4572000" cy="1950720"/>
+          </a:xfrm>
+          <a:prstGeom prst="rect">
+            <a:avLst/>
+          </a:prstGeom>
+          <a:solidFill>
+            <a:srgbClr val="FFFFFF"/>
+          </a:solidFill>
+          <a:ln w="8467">
+            <a:solidFill>
+              <a:srgbClr val="E5E7EB"/>
+            </a:solidFill>
+          </a:ln>
+        </p:spPr>
+        <p:style>
+          <a:lnRef idx="1">
+            <a:schemeClr val="accent1"/>
+          </a:lnRef>
+          <a:fillRef idx="3">
+            <a:schemeClr val="accent1"/>
+          </a:fillRef>
+          <a:effectRef idx="2">
+            <a:schemeClr val="accent1"/>
+          </a:effectRef>
+          <a:fontRef idx="minor">
+            <a:schemeClr val="lt1"/>
+          </a:fontRef>
+        </p:style>
+        <p:txBody>
+          <a:bodyPr wrap="square" lIns="60960" tIns="30480" rIns="60960" bIns="30480" rtlCol="0" anchor="ctr">
+            <a:noAutofit/>
+          </a:bodyPr>
+          <a:lstStyle/>
+          <a:p>
+            <a:pPr algn="ctr">
+              <a:defRPr/>
+            </a:pPr>
+            <a:endParaRPr/>
+          </a:p>
+        </p:txBody>
+      </p:sp>
+      <p:sp>
+        <p:nvSpPr>
+          <p:cNvPr id="13" name="TextBox 12"/>
+          <p:cNvSpPr txBox="1"/>
+          <p:nvPr/>
+        </p:nvSpPr>
+        <p:spPr>
+          <a:xfrm>
+            <a:off x="7498080" y="3230880"/>
+            <a:ext cx="4145280" cy="304800"/>
+          </a:xfrm>
+          <a:prstGeom prst="rect">
+            <a:avLst/>
+          </a:prstGeom>
+          <a:noFill/>
+          <a:ln/>
+        </p:spPr>
+        <p:txBody>
+          <a:bodyPr wrap="square" lIns="60960" tIns="30480" rIns="60960" bIns="30480">
+            <a:noAutofit/>
+          </a:bodyPr>
+          <a:lstStyle/>
+          <a:p>
+            <a:pPr algn="l">
+              <a:defRPr/>
+            </a:pPr>
+            <a:r>
+              <a:rPr sz="1200" b="1">
+                <a:solidFill>
+                  <a:srgbClr val="111848"/>
+                </a:solidFill>
+                <a:latin typeface="Calibri"/>
+              </a:rPr>
+              <a:t>💡 시청 포인트</a:t>
+            </a:r>
+          </a:p>
+        </p:txBody>
+      </p:sp>
+      <p:sp>
+        <p:nvSpPr>
+          <p:cNvPr id="14" name="TextBox 13"/>
+          <p:cNvSpPr txBox="1"/>
+          <p:nvPr/>
+        </p:nvSpPr>
+        <p:spPr>
+          <a:xfrm>
+            <a:off x="7498080" y="3596640"/>
+            <a:ext cx="4145280" cy="1219200"/>
+          </a:xfrm>
+          <a:prstGeom prst="rect">
+            <a:avLst/>
+          </a:prstGeom>
+          <a:noFill/>
+          <a:ln/>
+        </p:spPr>
+        <p:txBody>
+          <a:bodyPr wrap="square" lIns="60960" tIns="30480" rIns="60960" bIns="30480">
+            <a:noAutofit/>
+          </a:bodyPr>
+          <a:lstStyle/>
+          <a:p>
+            <a:pPr algn="l">
+              <a:defRPr/>
+            </a:pPr>
+            <a:r>
+              <a:rPr sz="1133" b="0">
+                <a:solidFill>
+                  <a:srgbClr val="111848"/>
+                </a:solidFill>
+                <a:latin typeface="Calibri"/>
+              </a:rPr>
+              <a:t>① 공격이 어떻게 시작되었는가?
+② 방어 실패의 핵심 원인은?
+③ 오늘 실습에서 재현할 부분은?</a:t>
+            </a:r>
+          </a:p>
+        </p:txBody>
+      </p:sp>
+      <p:sp>
+        <p:nvSpPr>
+          <p:cNvPr id="15" name="Rectangle 14"/>
+          <p:cNvSpPr/>
+          <p:nvPr/>
+        </p:nvSpPr>
+        <p:spPr>
+          <a:xfrm>
+            <a:off x="0" y="5852160"/>
+            <a:ext cx="12192000" cy="36576"/>
+          </a:xfrm>
+          <a:prstGeom prst="rect">
+            <a:avLst/>
+          </a:prstGeom>
+          <a:solidFill>
+            <a:srgbClr val="E5E7EB"/>
+          </a:solidFill>
+          <a:ln>
+            <a:noFill/>
+          </a:ln>
+        </p:spPr>
+        <p:style>
+          <a:lnRef idx="1">
+            <a:schemeClr val="accent1"/>
+          </a:lnRef>
+          <a:fillRef idx="3">
+            <a:schemeClr val="accent1"/>
+          </a:fillRef>
+          <a:effectRef idx="2">
+            <a:schemeClr val="accent1"/>
+          </a:effectRef>
+          <a:fontRef idx="minor">
+            <a:schemeClr val="lt1"/>
+          </a:fontRef>
+        </p:style>
+        <p:txBody>
+          <a:bodyPr wrap="square" lIns="60960" tIns="30480" rIns="60960" bIns="30480" rtlCol="0" anchor="ctr">
+            <a:noAutofit/>
+          </a:bodyPr>
+          <a:lstStyle/>
+          <a:p>
+            <a:pPr algn="ctr">
+              <a:defRPr/>
+            </a:pPr>
+            <a:endParaRPr/>
+          </a:p>
+        </p:txBody>
+      </p:sp>
+      <p:sp>
+        <p:nvSpPr>
+          <p:cNvPr id="16" name="TextBox 15"/>
+          <p:cNvSpPr txBox="1"/>
+          <p:nvPr/>
+        </p:nvSpPr>
+        <p:spPr>
+          <a:xfrm>
+            <a:off x="0" y="5913120"/>
+            <a:ext cx="12192000" cy="304800"/>
+          </a:xfrm>
+          <a:prstGeom prst="rect">
+            <a:avLst/>
+          </a:prstGeom>
+          <a:noFill/>
+          <a:ln/>
+        </p:spPr>
+        <p:txBody>
+          <a:bodyPr wrap="square" lIns="60960" tIns="30480" rIns="60960" bIns="30480">
+            <a:noAutofit/>
+          </a:bodyPr>
+          <a:lstStyle/>
+          <a:p>
+            <a:pPr algn="ctr">
+              <a:defRPr/>
+            </a:pPr>
+            <a:r>
+              <a:rPr sz="1066" b="0">
+                <a:solidFill>
+                  <a:srgbClr val="6B7280"/>
+                </a:solidFill>
+                <a:latin typeface="Calibri"/>
+              </a:rPr>
+              <a:t>영상 시청 후 바로 실습 — 본 슬라이드의 시나리오와 동일한 공격을 직접 재현합니다</a:t>
+            </a:r>
+          </a:p>
+        </p:txBody>
+      </p:sp>
+    </p:spTree>
+  </p:cSld>
+  <p:clrMapOvr>
+    <a:masterClrMapping/>
+  </p:clrMapOvr>
+</p:sld>
+</file>
+
+<file path=ppt/slides/slide3.xml><?xml version="1.0" encoding="utf-8"?>
+<p:sld xmlns:a="http://schemas.openxmlformats.org/drawingml/2006/main" xmlns:r="http://schemas.openxmlformats.org/officeDocument/2006/relationships" xmlns:p="http://schemas.openxmlformats.org/presentationml/2006/main">
+  <p:cSld>
     <p:spTree>
       <p:nvGrpSpPr>
         <p:cNvPr id="1" name=""/>
@@ -20622,7 +23786,7 @@
 </p:sld>
 </file>
 
-<file path=ppt/slides/slide3.xml><?xml version="1.0" encoding="utf-8"?>
+<file path=ppt/slides/slide4.xml><?xml version="1.0" encoding="utf-8"?>
 <p:sld xmlns:a="http://schemas.openxmlformats.org/drawingml/2006/main" xmlns:r="http://schemas.openxmlformats.org/officeDocument/2006/relationships" xmlns:p="http://schemas.openxmlformats.org/presentationml/2006/main">
   <p:cSld name="Slide 2">
     <p:bg>
@@ -22684,7 +25848,7 @@
 </p:sld>
 </file>
 
-<file path=ppt/slides/slide4.xml><?xml version="1.0" encoding="utf-8"?>
+<file path=ppt/slides/slide5.xml><?xml version="1.0" encoding="utf-8"?>
 <p:sld xmlns:a="http://schemas.openxmlformats.org/drawingml/2006/main" xmlns:r="http://schemas.openxmlformats.org/officeDocument/2006/relationships" xmlns:p="http://schemas.openxmlformats.org/presentationml/2006/main">
   <p:cSld name="Slide 3">
     <p:bg>
@@ -23467,7 +26631,7 @@
 </p:sld>
 </file>
 
-<file path=ppt/slides/slide5.xml><?xml version="1.0" encoding="utf-8"?>
+<file path=ppt/slides/slide6.xml><?xml version="1.0" encoding="utf-8"?>
 <p:sld xmlns:a="http://schemas.openxmlformats.org/drawingml/2006/main" xmlns:r="http://schemas.openxmlformats.org/officeDocument/2006/relationships" xmlns:p="http://schemas.openxmlformats.org/presentationml/2006/main">
   <p:cSld name="Slide 4">
     <p:bg>
@@ -24695,7 +27859,7 @@
 </p:sld>
 </file>
 
-<file path=ppt/slides/slide6.xml><?xml version="1.0" encoding="utf-8"?>
+<file path=ppt/slides/slide7.xml><?xml version="1.0" encoding="utf-8"?>
 <p:sld xmlns:a="http://schemas.openxmlformats.org/drawingml/2006/main" xmlns:r="http://schemas.openxmlformats.org/officeDocument/2006/relationships" xmlns:p="http://schemas.openxmlformats.org/presentationml/2006/main">
   <p:cSld name="Slide 5">
     <p:bg>
@@ -26185,7 +29349,7 @@
 </p:sld>
 </file>
 
-<file path=ppt/slides/slide7.xml><?xml version="1.0" encoding="utf-8"?>
+<file path=ppt/slides/slide8.xml><?xml version="1.0" encoding="utf-8"?>
 <p:sld xmlns:a="http://schemas.openxmlformats.org/drawingml/2006/main" xmlns:r="http://schemas.openxmlformats.org/officeDocument/2006/relationships" xmlns:p="http://schemas.openxmlformats.org/presentationml/2006/main">
   <p:cSld name="Slide 7">
     <p:bg>
@@ -27007,7 +30171,7 @@
 </p:sld>
 </file>
 
-<file path=ppt/slides/slide8.xml><?xml version="1.0" encoding="utf-8"?>
+<file path=ppt/slides/slide9.xml><?xml version="1.0" encoding="utf-8"?>
 <p:sld xmlns:a="http://schemas.openxmlformats.org/drawingml/2006/main" xmlns:r="http://schemas.openxmlformats.org/officeDocument/2006/relationships" xmlns:p="http://schemas.openxmlformats.org/presentationml/2006/main">
   <p:cSld name="Slide 8">
     <p:bg>
@@ -28261,1507 +31425,6 @@
                 <a:cs typeface="Arial" pitchFamily="34" charset="-120"/>
               </a:rPr>
               <a:t>8 / 18</a:t>
-            </a:r>
-            <a:endParaRPr lang="en-US" sz="900" dirty="0"/>
-          </a:p>
-        </p:txBody>
-      </p:sp>
-    </p:spTree>
-  </p:cSld>
-  <p:clrMapOvr>
-    <a:masterClrMapping/>
-  </p:clrMapOvr>
-</p:sld>
-</file>
-
-<file path=ppt/slides/slide9.xml><?xml version="1.0" encoding="utf-8"?>
-<p:sld xmlns:a="http://schemas.openxmlformats.org/drawingml/2006/main" xmlns:r="http://schemas.openxmlformats.org/officeDocument/2006/relationships" xmlns:p="http://schemas.openxmlformats.org/presentationml/2006/main">
-  <p:cSld name="Slide 9">
-    <p:bg>
-      <p:bgPr>
-        <a:solidFill>
-          <a:srgbClr val="FFFFFF"/>
-        </a:solidFill>
-        <a:effectLst/>
-      </p:bgPr>
-    </p:bg>
-    <p:spTree>
-      <p:nvGrpSpPr>
-        <p:cNvPr id="1" name=""/>
-        <p:cNvGrpSpPr/>
-        <p:nvPr/>
-      </p:nvGrpSpPr>
-      <p:grpSpPr>
-        <a:xfrm>
-          <a:off x="0" y="0"/>
-          <a:ext cx="0" cy="0"/>
-          <a:chOff x="0" y="0"/>
-          <a:chExt cx="0" cy="0"/>
-        </a:xfrm>
-      </p:grpSpPr>
-      <p:sp>
-        <p:nvSpPr>
-          <p:cNvPr id="2" name="Text 0"/>
-          <p:cNvSpPr/>
-          <p:nvPr/>
-        </p:nvSpPr>
-        <p:spPr>
-          <a:xfrm>
-            <a:off x="365760" y="228600"/>
-            <a:ext cx="10972800" cy="365760"/>
-          </a:xfrm>
-          <a:prstGeom prst="rect">
-            <a:avLst/>
-          </a:prstGeom>
-          <a:noFill/>
-          <a:ln/>
-        </p:spPr>
-        <p:txBody>
-          <a:bodyPr wrap="square" lIns="0" tIns="0" rIns="0" bIns="0" rtlCol="0" anchor="ctr"/>
-          <a:lstStyle/>
-          <a:p>
-            <a:pPr marL="0" indent="0">
-              <a:buNone/>
-            </a:pPr>
-            <a:r>
-              <a:rPr lang="en-US" sz="1550" b="1" dirty="0">
-                <a:solidFill>
-                  <a:srgbClr val="111848"/>
-                </a:solidFill>
-                <a:latin typeface="Arial" pitchFamily="34" charset="0"/>
-                <a:ea typeface="Arial" pitchFamily="34" charset="-122"/>
-                <a:cs typeface="Arial" pitchFamily="34" charset="-120"/>
-              </a:rPr>
-              <a:t>🛡️ Step B-2 — 방어: M11 FAISS RAG + 출처 인용 강제</a:t>
-            </a:r>
-            <a:endParaRPr lang="en-US" sz="1550" dirty="0"/>
-          </a:p>
-        </p:txBody>
-      </p:sp>
-      <p:sp>
-        <p:nvSpPr>
-          <p:cNvPr id="3" name="Shape 1"/>
-          <p:cNvSpPr/>
-          <p:nvPr/>
-        </p:nvSpPr>
-        <p:spPr>
-          <a:xfrm>
-            <a:off x="0" y="548640"/>
-            <a:ext cx="12161520" cy="36576"/>
-          </a:xfrm>
-          <a:prstGeom prst="rect">
-            <a:avLst/>
-          </a:prstGeom>
-          <a:solidFill>
-            <a:srgbClr val="10B981"/>
-          </a:solidFill>
-          <a:ln/>
-        </p:spPr>
-        <p:txBody>
-          <a:bodyPr/>
-          <a:lstStyle/>
-          <a:p>
-            <a:endParaRPr lang="ko-KR" altLang="en-US"/>
-          </a:p>
-        </p:txBody>
-      </p:sp>
-      <p:sp>
-        <p:nvSpPr>
-          <p:cNvPr id="4" name="Shape 2"/>
-          <p:cNvSpPr/>
-          <p:nvPr/>
-        </p:nvSpPr>
-        <p:spPr>
-          <a:xfrm>
-            <a:off x="274320" y="640080"/>
-            <a:ext cx="5303520" cy="1920240"/>
-          </a:xfrm>
-          <a:prstGeom prst="rect">
-            <a:avLst/>
-          </a:prstGeom>
-          <a:solidFill>
-            <a:srgbClr val="FFFFFF"/>
-          </a:solidFill>
-          <a:ln w="15240">
-            <a:solidFill>
-              <a:srgbClr val="10B981"/>
-            </a:solidFill>
-            <a:prstDash val="solid"/>
-          </a:ln>
-          <a:effectLst>
-            <a:outerShdw blurRad="63500" dist="25400" dir="8100000" algn="bl" rotWithShape="0">
-              <a:srgbClr val="000000">
-                <a:alpha val="10000"/>
-              </a:srgbClr>
-            </a:outerShdw>
-          </a:effectLst>
-        </p:spPr>
-        <p:txBody>
-          <a:bodyPr/>
-          <a:lstStyle/>
-          <a:p>
-            <a:endParaRPr lang="ko-KR" altLang="en-US"/>
-          </a:p>
-        </p:txBody>
-      </p:sp>
-      <p:sp>
-        <p:nvSpPr>
-          <p:cNvPr id="5" name="Shape 3"/>
-          <p:cNvSpPr/>
-          <p:nvPr/>
-        </p:nvSpPr>
-        <p:spPr>
-          <a:xfrm>
-            <a:off x="274320" y="640080"/>
-            <a:ext cx="5303520" cy="329184"/>
-          </a:xfrm>
-          <a:prstGeom prst="rect">
-            <a:avLst/>
-          </a:prstGeom>
-          <a:solidFill>
-            <a:srgbClr val="10B981"/>
-          </a:solidFill>
-          <a:ln w="12700">
-            <a:solidFill>
-              <a:srgbClr val="10B981"/>
-            </a:solidFill>
-            <a:prstDash val="solid"/>
-          </a:ln>
-        </p:spPr>
-        <p:txBody>
-          <a:bodyPr/>
-          <a:lstStyle/>
-          <a:p>
-            <a:endParaRPr lang="ko-KR" altLang="en-US"/>
-          </a:p>
-        </p:txBody>
-      </p:sp>
-      <p:sp>
-        <p:nvSpPr>
-          <p:cNvPr id="6" name="Text 4"/>
-          <p:cNvSpPr/>
-          <p:nvPr/>
-        </p:nvSpPr>
-        <p:spPr>
-          <a:xfrm>
-            <a:off x="384048" y="640080"/>
-            <a:ext cx="5084064" cy="329184"/>
-          </a:xfrm>
-          <a:prstGeom prst="rect">
-            <a:avLst/>
-          </a:prstGeom>
-          <a:noFill/>
-          <a:ln/>
-        </p:spPr>
-        <p:txBody>
-          <a:bodyPr wrap="square" lIns="0" tIns="0" rIns="0" bIns="0" rtlCol="0" anchor="ctr"/>
-          <a:lstStyle/>
-          <a:p>
-            <a:pPr marL="0" indent="0">
-              <a:buNone/>
-            </a:pPr>
-            <a:r>
-              <a:rPr lang="en-US" sz="1100" b="1" dirty="0">
-                <a:solidFill>
-                  <a:srgbClr val="FFFFFF"/>
-                </a:solidFill>
-                <a:latin typeface="Arial" pitchFamily="34" charset="0"/>
-                <a:ea typeface="Arial" pitchFamily="34" charset="-122"/>
-                <a:cs typeface="Arial" pitchFamily="34" charset="-120"/>
-              </a:rPr>
-              <a:t>방어 전략: M11 FAISS RAG</a:t>
-            </a:r>
-            <a:endParaRPr lang="en-US" sz="1100" dirty="0"/>
-          </a:p>
-        </p:txBody>
-      </p:sp>
-      <p:sp>
-        <p:nvSpPr>
-          <p:cNvPr id="7" name="Text 5"/>
-          <p:cNvSpPr/>
-          <p:nvPr/>
-        </p:nvSpPr>
-        <p:spPr>
-          <a:xfrm>
-            <a:off x="411480" y="1042416"/>
-            <a:ext cx="5029200" cy="246888"/>
-          </a:xfrm>
-          <a:prstGeom prst="rect">
-            <a:avLst/>
-          </a:prstGeom>
-          <a:noFill/>
-          <a:ln/>
-        </p:spPr>
-        <p:txBody>
-          <a:bodyPr wrap="square" rtlCol="0" anchor="ctr"/>
-          <a:lstStyle/>
-          <a:p>
-            <a:pPr marL="0" indent="0">
-              <a:buNone/>
-            </a:pPr>
-            <a:r>
-              <a:rPr lang="en-US" sz="1000" b="1" dirty="0">
-                <a:solidFill>
-                  <a:srgbClr val="10B981"/>
-                </a:solidFill>
-                <a:latin typeface="Arial" pitchFamily="34" charset="0"/>
-                <a:ea typeface="Arial" pitchFamily="34" charset="-122"/>
-                <a:cs typeface="Arial" pitchFamily="34" charset="-120"/>
-              </a:rPr>
-              <a:t>DIST_THRESHOLD = 1.2 (L2 거리 임계값)</a:t>
-            </a:r>
-            <a:endParaRPr lang="en-US" sz="1000" dirty="0"/>
-          </a:p>
-        </p:txBody>
-      </p:sp>
-      <p:sp>
-        <p:nvSpPr>
-          <p:cNvPr id="8" name="Text 6"/>
-          <p:cNvSpPr/>
-          <p:nvPr/>
-        </p:nvSpPr>
-        <p:spPr>
-          <a:xfrm>
-            <a:off x="411480" y="1316736"/>
-            <a:ext cx="5029200" cy="246888"/>
-          </a:xfrm>
-          <a:prstGeom prst="rect">
-            <a:avLst/>
-          </a:prstGeom>
-          <a:noFill/>
-          <a:ln/>
-        </p:spPr>
-        <p:txBody>
-          <a:bodyPr wrap="square" rtlCol="0" anchor="ctr"/>
-          <a:lstStyle/>
-          <a:p>
-            <a:pPr marL="0" indent="0">
-              <a:buNone/>
-            </a:pPr>
-            <a:r>
-              <a:rPr lang="en-US" sz="1000" dirty="0">
-                <a:solidFill>
-                  <a:srgbClr val="111848"/>
-                </a:solidFill>
-                <a:latin typeface="Arial" pitchFamily="34" charset="0"/>
-                <a:ea typeface="Arial" pitchFamily="34" charset="-122"/>
-                <a:cs typeface="Arial" pitchFamily="34" charset="-120"/>
-              </a:rPr>
-              <a:t> • 임계값 초과 = '헌법에 없는 내용'으로 거부</a:t>
-            </a:r>
-            <a:endParaRPr lang="en-US" sz="1000" dirty="0"/>
-          </a:p>
-        </p:txBody>
-      </p:sp>
-      <p:sp>
-        <p:nvSpPr>
-          <p:cNvPr id="9" name="Text 7"/>
-          <p:cNvSpPr/>
-          <p:nvPr/>
-        </p:nvSpPr>
-        <p:spPr>
-          <a:xfrm>
-            <a:off x="411480" y="1591056"/>
-            <a:ext cx="5029200" cy="246888"/>
-          </a:xfrm>
-          <a:prstGeom prst="rect">
-            <a:avLst/>
-          </a:prstGeom>
-          <a:noFill/>
-          <a:ln/>
-        </p:spPr>
-        <p:txBody>
-          <a:bodyPr wrap="square" rtlCol="0" anchor="ctr"/>
-          <a:lstStyle/>
-          <a:p>
-            <a:pPr marL="0" indent="0">
-              <a:buNone/>
-            </a:pPr>
-            <a:r>
-              <a:rPr lang="en-US" sz="1000" dirty="0">
-                <a:solidFill>
-                  <a:srgbClr val="111848"/>
-                </a:solidFill>
-                <a:latin typeface="Arial" pitchFamily="34" charset="0"/>
-                <a:ea typeface="Arial" pitchFamily="34" charset="-122"/>
-                <a:cs typeface="Arial" pitchFamily="34" charset="-120"/>
-              </a:rPr>
-              <a:t> • 임계값 이하 = 관련 조항 + [출처:ID] 의무</a:t>
-            </a:r>
-            <a:endParaRPr lang="en-US" sz="1000" dirty="0"/>
-          </a:p>
-        </p:txBody>
-      </p:sp>
-      <p:sp>
-        <p:nvSpPr>
-          <p:cNvPr id="10" name="Text 8"/>
-          <p:cNvSpPr/>
-          <p:nvPr/>
-        </p:nvSpPr>
-        <p:spPr>
-          <a:xfrm>
-            <a:off x="411480" y="1865376"/>
-            <a:ext cx="5029200" cy="246888"/>
-          </a:xfrm>
-          <a:prstGeom prst="rect">
-            <a:avLst/>
-          </a:prstGeom>
-          <a:noFill/>
-          <a:ln/>
-        </p:spPr>
-        <p:txBody>
-          <a:bodyPr wrap="square" rtlCol="0" anchor="ctr"/>
-          <a:lstStyle/>
-          <a:p>
-            <a:pPr marL="0" indent="0">
-              <a:buNone/>
-            </a:pPr>
-            <a:r>
-              <a:rPr lang="en-US" sz="1000" dirty="0">
-                <a:solidFill>
-                  <a:srgbClr val="111848"/>
-                </a:solidFill>
-                <a:latin typeface="Arial" pitchFamily="34" charset="0"/>
-                <a:ea typeface="Arial" pitchFamily="34" charset="-122"/>
-                <a:cs typeface="Arial" pitchFamily="34" charset="-120"/>
-              </a:rPr>
-              <a:t>→ 근거 없으면 응답 불가 = 환각 차단</a:t>
-            </a:r>
-            <a:endParaRPr lang="en-US" sz="1000" dirty="0"/>
-          </a:p>
-        </p:txBody>
-      </p:sp>
-      <p:sp>
-        <p:nvSpPr>
-          <p:cNvPr id="11" name="Shape 9"/>
-          <p:cNvSpPr/>
-          <p:nvPr/>
-        </p:nvSpPr>
-        <p:spPr>
-          <a:xfrm>
-            <a:off x="274320" y="2670048"/>
-            <a:ext cx="5303520" cy="1463040"/>
-          </a:xfrm>
-          <a:prstGeom prst="rect">
-            <a:avLst/>
-          </a:prstGeom>
-          <a:solidFill>
-            <a:srgbClr val="FFFFFF"/>
-          </a:solidFill>
-          <a:ln w="15240">
-            <a:solidFill>
-              <a:srgbClr val="0F766E"/>
-            </a:solidFill>
-            <a:prstDash val="solid"/>
-          </a:ln>
-          <a:effectLst>
-            <a:outerShdw blurRad="63500" dist="25400" dir="8100000" algn="bl" rotWithShape="0">
-              <a:srgbClr val="000000">
-                <a:alpha val="10000"/>
-              </a:srgbClr>
-            </a:outerShdw>
-          </a:effectLst>
-        </p:spPr>
-        <p:txBody>
-          <a:bodyPr/>
-          <a:lstStyle/>
-          <a:p>
-            <a:endParaRPr lang="ko-KR" altLang="en-US"/>
-          </a:p>
-        </p:txBody>
-      </p:sp>
-      <p:sp>
-        <p:nvSpPr>
-          <p:cNvPr id="12" name="Shape 10"/>
-          <p:cNvSpPr/>
-          <p:nvPr/>
-        </p:nvSpPr>
-        <p:spPr>
-          <a:xfrm>
-            <a:off x="274320" y="2670048"/>
-            <a:ext cx="5303520" cy="329184"/>
-          </a:xfrm>
-          <a:prstGeom prst="rect">
-            <a:avLst/>
-          </a:prstGeom>
-          <a:solidFill>
-            <a:srgbClr val="0F766E"/>
-          </a:solidFill>
-          <a:ln w="12700">
-            <a:solidFill>
-              <a:srgbClr val="0F766E"/>
-            </a:solidFill>
-            <a:prstDash val="solid"/>
-          </a:ln>
-        </p:spPr>
-        <p:txBody>
-          <a:bodyPr/>
-          <a:lstStyle/>
-          <a:p>
-            <a:endParaRPr lang="ko-KR" altLang="en-US"/>
-          </a:p>
-        </p:txBody>
-      </p:sp>
-      <p:sp>
-        <p:nvSpPr>
-          <p:cNvPr id="13" name="Text 11"/>
-          <p:cNvSpPr/>
-          <p:nvPr/>
-        </p:nvSpPr>
-        <p:spPr>
-          <a:xfrm>
-            <a:off x="384048" y="2670048"/>
-            <a:ext cx="5084064" cy="329184"/>
-          </a:xfrm>
-          <a:prstGeom prst="rect">
-            <a:avLst/>
-          </a:prstGeom>
-          <a:noFill/>
-          <a:ln/>
-        </p:spPr>
-        <p:txBody>
-          <a:bodyPr wrap="square" lIns="0" tIns="0" rIns="0" bIns="0" rtlCol="0" anchor="ctr"/>
-          <a:lstStyle/>
-          <a:p>
-            <a:pPr marL="0" indent="0">
-              <a:buNone/>
-            </a:pPr>
-            <a:r>
-              <a:rPr lang="en-US" sz="1100" b="1" dirty="0">
-                <a:solidFill>
-                  <a:srgbClr val="FFFFFF"/>
-                </a:solidFill>
-                <a:latin typeface="Arial" pitchFamily="34" charset="0"/>
-                <a:ea typeface="Arial" pitchFamily="34" charset="-122"/>
-                <a:cs typeface="Arial" pitchFamily="34" charset="-120"/>
-              </a:rPr>
-              <a:t>DIST_THRESHOLD 트레이드오프</a:t>
-            </a:r>
-            <a:endParaRPr lang="en-US" sz="1100" dirty="0"/>
-          </a:p>
-        </p:txBody>
-      </p:sp>
-      <p:sp>
-        <p:nvSpPr>
-          <p:cNvPr id="14" name="Text 12"/>
-          <p:cNvSpPr/>
-          <p:nvPr/>
-        </p:nvSpPr>
-        <p:spPr>
-          <a:xfrm>
-            <a:off x="411480" y="3072384"/>
-            <a:ext cx="5029200" cy="246888"/>
-          </a:xfrm>
-          <a:prstGeom prst="rect">
-            <a:avLst/>
-          </a:prstGeom>
-          <a:noFill/>
-          <a:ln/>
-        </p:spPr>
-        <p:txBody>
-          <a:bodyPr wrap="square" rtlCol="0" anchor="ctr"/>
-          <a:lstStyle/>
-          <a:p>
-            <a:pPr marL="0" indent="0">
-              <a:buNone/>
-            </a:pPr>
-            <a:r>
-              <a:rPr lang="en-US" sz="1000" dirty="0">
-                <a:solidFill>
-                  <a:srgbClr val="111848"/>
-                </a:solidFill>
-                <a:latin typeface="Arial" pitchFamily="34" charset="0"/>
-                <a:ea typeface="Arial" pitchFamily="34" charset="-122"/>
-                <a:cs typeface="Arial" pitchFamily="34" charset="-120"/>
-              </a:rPr>
-              <a:t>너무 크게 설정 → 관련 없는 내용도 통과 (환각 증가)</a:t>
-            </a:r>
-            <a:endParaRPr lang="en-US" sz="1000" dirty="0"/>
-          </a:p>
-        </p:txBody>
-      </p:sp>
-      <p:sp>
-        <p:nvSpPr>
-          <p:cNvPr id="15" name="Text 13"/>
-          <p:cNvSpPr/>
-          <p:nvPr/>
-        </p:nvSpPr>
-        <p:spPr>
-          <a:xfrm>
-            <a:off x="411480" y="3346704"/>
-            <a:ext cx="5029200" cy="246888"/>
-          </a:xfrm>
-          <a:prstGeom prst="rect">
-            <a:avLst/>
-          </a:prstGeom>
-          <a:noFill/>
-          <a:ln/>
-        </p:spPr>
-        <p:txBody>
-          <a:bodyPr wrap="square" rtlCol="0" anchor="ctr"/>
-          <a:lstStyle/>
-          <a:p>
-            <a:pPr marL="0" indent="0">
-              <a:buNone/>
-            </a:pPr>
-            <a:r>
-              <a:rPr lang="en-US" sz="1000" dirty="0">
-                <a:solidFill>
-                  <a:srgbClr val="111848"/>
-                </a:solidFill>
-                <a:latin typeface="Arial" pitchFamily="34" charset="0"/>
-                <a:ea typeface="Arial" pitchFamily="34" charset="-122"/>
-                <a:cs typeface="Arial" pitchFamily="34" charset="-120"/>
-              </a:rPr>
-              <a:t>너무 작게 설정 → 실제 관련 조항도 거부 (재현율 감소)</a:t>
-            </a:r>
-            <a:endParaRPr lang="en-US" sz="1000" dirty="0"/>
-          </a:p>
-        </p:txBody>
-      </p:sp>
-      <p:sp>
-        <p:nvSpPr>
-          <p:cNvPr id="16" name="Text 14"/>
-          <p:cNvSpPr/>
-          <p:nvPr/>
-        </p:nvSpPr>
-        <p:spPr>
-          <a:xfrm>
-            <a:off x="411480" y="3621024"/>
-            <a:ext cx="5029200" cy="246888"/>
-          </a:xfrm>
-          <a:prstGeom prst="rect">
-            <a:avLst/>
-          </a:prstGeom>
-          <a:noFill/>
-          <a:ln/>
-        </p:spPr>
-        <p:txBody>
-          <a:bodyPr wrap="square" rtlCol="0" anchor="ctr"/>
-          <a:lstStyle/>
-          <a:p>
-            <a:pPr marL="0" indent="0">
-              <a:buNone/>
-            </a:pPr>
-            <a:r>
-              <a:rPr lang="en-US" sz="1000" b="1" dirty="0">
-                <a:solidFill>
-                  <a:srgbClr val="0F766E"/>
-                </a:solidFill>
-                <a:latin typeface="Arial" pitchFamily="34" charset="0"/>
-                <a:ea typeface="Arial" pitchFamily="34" charset="-122"/>
-                <a:cs typeface="Arial" pitchFamily="34" charset="-120"/>
-              </a:rPr>
-              <a:t>→ 워크시트 주제: 정밀도 vs 재현율 트레이드오프</a:t>
-            </a:r>
-            <a:endParaRPr lang="en-US" sz="1000" dirty="0"/>
-          </a:p>
-        </p:txBody>
-      </p:sp>
-      <p:sp>
-        <p:nvSpPr>
-          <p:cNvPr id="17" name="Text 15"/>
-          <p:cNvSpPr/>
-          <p:nvPr/>
-        </p:nvSpPr>
-        <p:spPr>
-          <a:xfrm>
-            <a:off x="5760720" y="640080"/>
-            <a:ext cx="6126480" cy="320040"/>
-          </a:xfrm>
-          <a:prstGeom prst="rect">
-            <a:avLst/>
-          </a:prstGeom>
-          <a:noFill/>
-          <a:ln/>
-        </p:spPr>
-        <p:txBody>
-          <a:bodyPr wrap="square" rtlCol="0" anchor="ctr"/>
-          <a:lstStyle/>
-          <a:p>
-            <a:pPr marL="0" indent="0">
-              <a:buNone/>
-            </a:pPr>
-            <a:r>
-              <a:rPr lang="en-US" sz="1200" b="1" dirty="0">
-                <a:solidFill>
-                  <a:srgbClr val="111848"/>
-                </a:solidFill>
-                <a:latin typeface="Arial" pitchFamily="34" charset="0"/>
-                <a:ea typeface="Arial" pitchFamily="34" charset="-122"/>
-                <a:cs typeface="Arial" pitchFamily="34" charset="-120"/>
-              </a:rPr>
-              <a:t>Cell 22: 실행 코드</a:t>
-            </a:r>
-            <a:endParaRPr lang="en-US" sz="1200" dirty="0"/>
-          </a:p>
-        </p:txBody>
-      </p:sp>
-      <p:sp>
-        <p:nvSpPr>
-          <p:cNvPr id="18" name="Shape 16"/>
-          <p:cNvSpPr/>
-          <p:nvPr/>
-        </p:nvSpPr>
-        <p:spPr>
-          <a:xfrm>
-            <a:off x="5760720" y="1005839"/>
-            <a:ext cx="6126480" cy="5424777"/>
-          </a:xfrm>
-          <a:prstGeom prst="rect">
-            <a:avLst/>
-          </a:prstGeom>
-          <a:solidFill>
-            <a:srgbClr val="0D1117"/>
-          </a:solidFill>
-          <a:ln/>
-          <a:effectLst>
-            <a:outerShdw blurRad="63500" dist="25400" dir="8100000" algn="bl" rotWithShape="0">
-              <a:srgbClr val="000000">
-                <a:alpha val="10000"/>
-              </a:srgbClr>
-            </a:outerShdw>
-          </a:effectLst>
-        </p:spPr>
-        <p:txBody>
-          <a:bodyPr/>
-          <a:lstStyle/>
-          <a:p>
-            <a:endParaRPr lang="ko-KR" altLang="en-US"/>
-          </a:p>
-        </p:txBody>
-      </p:sp>
-      <p:sp>
-        <p:nvSpPr>
-          <p:cNvPr id="19" name="Text 17"/>
-          <p:cNvSpPr/>
-          <p:nvPr/>
-        </p:nvSpPr>
-        <p:spPr>
-          <a:xfrm>
-            <a:off x="5897880" y="1115568"/>
-            <a:ext cx="5852160" cy="228600"/>
-          </a:xfrm>
-          <a:prstGeom prst="rect">
-            <a:avLst/>
-          </a:prstGeom>
-          <a:noFill/>
-          <a:ln/>
-        </p:spPr>
-        <p:txBody>
-          <a:bodyPr wrap="square" lIns="0" tIns="0" rIns="0" bIns="0" rtlCol="0" anchor="ctr"/>
-          <a:lstStyle/>
-          <a:p>
-            <a:pPr marL="0" indent="0">
-              <a:buNone/>
-            </a:pPr>
-            <a:r>
-              <a:rPr lang="en-US" sz="950" dirty="0">
-                <a:solidFill>
-                  <a:srgbClr val="F59E0B"/>
-                </a:solidFill>
-                <a:latin typeface="Consolas" pitchFamily="34" charset="0"/>
-                <a:ea typeface="Consolas" pitchFamily="34" charset="-122"/>
-                <a:cs typeface="Consolas" pitchFamily="34" charset="-120"/>
-              </a:rPr>
-              <a:t>DIST_THRESHOLD = 1.2  # L2 거리 임계값</a:t>
-            </a:r>
-            <a:endParaRPr lang="en-US" sz="950" dirty="0"/>
-          </a:p>
-        </p:txBody>
-      </p:sp>
-      <p:sp>
-        <p:nvSpPr>
-          <p:cNvPr id="20" name="Text 18"/>
-          <p:cNvSpPr/>
-          <p:nvPr/>
-        </p:nvSpPr>
-        <p:spPr>
-          <a:xfrm>
-            <a:off x="5897880" y="1362456"/>
-            <a:ext cx="5852160" cy="228600"/>
-          </a:xfrm>
-          <a:prstGeom prst="rect">
-            <a:avLst/>
-          </a:prstGeom>
-          <a:noFill/>
-          <a:ln/>
-        </p:spPr>
-        <p:txBody>
-          <a:bodyPr wrap="square" lIns="0" tIns="0" rIns="0" bIns="0" rtlCol="0" anchor="ctr"/>
-          <a:lstStyle/>
-          <a:p>
-            <a:pPr marL="0" indent="0">
-              <a:buNone/>
-            </a:pPr>
-            <a:endParaRPr lang="en-US" sz="950" dirty="0"/>
-          </a:p>
-        </p:txBody>
-      </p:sp>
-      <p:sp>
-        <p:nvSpPr>
-          <p:cNvPr id="21" name="Text 19"/>
-          <p:cNvSpPr/>
-          <p:nvPr/>
-        </p:nvSpPr>
-        <p:spPr>
-          <a:xfrm>
-            <a:off x="5897880" y="1609344"/>
-            <a:ext cx="5852160" cy="228600"/>
-          </a:xfrm>
-          <a:prstGeom prst="rect">
-            <a:avLst/>
-          </a:prstGeom>
-          <a:noFill/>
-          <a:ln/>
-        </p:spPr>
-        <p:txBody>
-          <a:bodyPr wrap="square" lIns="0" tIns="0" rIns="0" bIns="0" rtlCol="0" anchor="ctr"/>
-          <a:lstStyle/>
-          <a:p>
-            <a:pPr marL="0" indent="0">
-              <a:buNone/>
-            </a:pPr>
-            <a:r>
-              <a:rPr lang="en-US" sz="950" dirty="0">
-                <a:solidFill>
-                  <a:srgbClr val="E6EDF3"/>
-                </a:solidFill>
-                <a:latin typeface="Consolas" pitchFamily="34" charset="0"/>
-                <a:ea typeface="Consolas" pitchFamily="34" charset="-122"/>
-                <a:cs typeface="Consolas" pitchFamily="34" charset="-120"/>
-              </a:rPr>
-              <a:t>def rag_ask(query):</a:t>
-            </a:r>
-            <a:endParaRPr lang="en-US" sz="950" dirty="0"/>
-          </a:p>
-        </p:txBody>
-      </p:sp>
-      <p:sp>
-        <p:nvSpPr>
-          <p:cNvPr id="22" name="Text 20"/>
-          <p:cNvSpPr/>
-          <p:nvPr/>
-        </p:nvSpPr>
-        <p:spPr>
-          <a:xfrm>
-            <a:off x="5897880" y="1856232"/>
-            <a:ext cx="5852160" cy="228600"/>
-          </a:xfrm>
-          <a:prstGeom prst="rect">
-            <a:avLst/>
-          </a:prstGeom>
-          <a:noFill/>
-          <a:ln/>
-        </p:spPr>
-        <p:txBody>
-          <a:bodyPr wrap="square" lIns="0" tIns="0" rIns="0" bIns="0" rtlCol="0" anchor="ctr"/>
-          <a:lstStyle/>
-          <a:p>
-            <a:pPr marL="0" indent="0">
-              <a:buNone/>
-            </a:pPr>
-            <a:r>
-              <a:rPr lang="en-US" sz="950" dirty="0">
-                <a:solidFill>
-                  <a:srgbClr val="8B949E"/>
-                </a:solidFill>
-                <a:latin typeface="Consolas" pitchFamily="34" charset="0"/>
-                <a:ea typeface="Consolas" pitchFamily="34" charset="-122"/>
-                <a:cs typeface="Consolas" pitchFamily="34" charset="-120"/>
-              </a:rPr>
-              <a:t>    # ① FAISS 유사도 검색 (L2 거리)</a:t>
-            </a:r>
-            <a:endParaRPr lang="en-US" sz="950" dirty="0"/>
-          </a:p>
-        </p:txBody>
-      </p:sp>
-      <p:sp>
-        <p:nvSpPr>
-          <p:cNvPr id="23" name="Text 21"/>
-          <p:cNvSpPr/>
-          <p:nvPr/>
-        </p:nvSpPr>
-        <p:spPr>
-          <a:xfrm>
-            <a:off x="5897880" y="2103120"/>
-            <a:ext cx="5852160" cy="228600"/>
-          </a:xfrm>
-          <a:prstGeom prst="rect">
-            <a:avLst/>
-          </a:prstGeom>
-          <a:noFill/>
-          <a:ln/>
-        </p:spPr>
-        <p:txBody>
-          <a:bodyPr wrap="square" lIns="0" tIns="0" rIns="0" bIns="0" rtlCol="0" anchor="ctr"/>
-          <a:lstStyle/>
-          <a:p>
-            <a:pPr marL="0" indent="0">
-              <a:buNone/>
-            </a:pPr>
-            <a:r>
-              <a:rPr lang="en-US" sz="950" dirty="0">
-                <a:solidFill>
-                  <a:srgbClr val="E6EDF3"/>
-                </a:solidFill>
-                <a:latin typeface="Consolas" pitchFamily="34" charset="0"/>
-                <a:ea typeface="Consolas" pitchFamily="34" charset="-122"/>
-                <a:cs typeface="Consolas" pitchFamily="34" charset="-120"/>
-              </a:rPr>
-              <a:t>    results = vectordb.similarity_search_with_score(</a:t>
-            </a:r>
-            <a:endParaRPr lang="en-US" sz="950" dirty="0"/>
-          </a:p>
-        </p:txBody>
-      </p:sp>
-      <p:sp>
-        <p:nvSpPr>
-          <p:cNvPr id="24" name="Text 22"/>
-          <p:cNvSpPr/>
-          <p:nvPr/>
-        </p:nvSpPr>
-        <p:spPr>
-          <a:xfrm>
-            <a:off x="5897880" y="2350008"/>
-            <a:ext cx="5852160" cy="228600"/>
-          </a:xfrm>
-          <a:prstGeom prst="rect">
-            <a:avLst/>
-          </a:prstGeom>
-          <a:noFill/>
-          <a:ln/>
-        </p:spPr>
-        <p:txBody>
-          <a:bodyPr wrap="square" lIns="0" tIns="0" rIns="0" bIns="0" rtlCol="0" anchor="ctr"/>
-          <a:lstStyle/>
-          <a:p>
-            <a:pPr marL="0" indent="0">
-              <a:buNone/>
-            </a:pPr>
-            <a:r>
-              <a:rPr lang="en-US" sz="950" dirty="0">
-                <a:solidFill>
-                  <a:srgbClr val="E6EDF3"/>
-                </a:solidFill>
-                <a:latin typeface="Consolas" pitchFamily="34" charset="0"/>
-                <a:ea typeface="Consolas" pitchFamily="34" charset="-122"/>
-                <a:cs typeface="Consolas" pitchFamily="34" charset="-120"/>
-              </a:rPr>
-              <a:t>        query, k=4)</a:t>
-            </a:r>
-            <a:endParaRPr lang="en-US" sz="950" dirty="0"/>
-          </a:p>
-        </p:txBody>
-      </p:sp>
-      <p:sp>
-        <p:nvSpPr>
-          <p:cNvPr id="25" name="Text 23"/>
-          <p:cNvSpPr/>
-          <p:nvPr/>
-        </p:nvSpPr>
-        <p:spPr>
-          <a:xfrm>
-            <a:off x="5897880" y="2596896"/>
-            <a:ext cx="5852160" cy="228600"/>
-          </a:xfrm>
-          <a:prstGeom prst="rect">
-            <a:avLst/>
-          </a:prstGeom>
-          <a:noFill/>
-          <a:ln/>
-        </p:spPr>
-        <p:txBody>
-          <a:bodyPr wrap="square" lIns="0" tIns="0" rIns="0" bIns="0" rtlCol="0" anchor="ctr"/>
-          <a:lstStyle/>
-          <a:p>
-            <a:pPr marL="0" indent="0">
-              <a:buNone/>
-            </a:pPr>
-            <a:r>
-              <a:rPr lang="en-US" sz="950" dirty="0">
-                <a:solidFill>
-                  <a:srgbClr val="8B949E"/>
-                </a:solidFill>
-                <a:latin typeface="Consolas" pitchFamily="34" charset="0"/>
-                <a:ea typeface="Consolas" pitchFamily="34" charset="-122"/>
-                <a:cs typeface="Consolas" pitchFamily="34" charset="-120"/>
-              </a:rPr>
-              <a:t>    # ② 임계값 필터</a:t>
-            </a:r>
-            <a:endParaRPr lang="en-US" sz="950" dirty="0"/>
-          </a:p>
-        </p:txBody>
-      </p:sp>
-      <p:sp>
-        <p:nvSpPr>
-          <p:cNvPr id="26" name="Text 24"/>
-          <p:cNvSpPr/>
-          <p:nvPr/>
-        </p:nvSpPr>
-        <p:spPr>
-          <a:xfrm>
-            <a:off x="5897880" y="2843784"/>
-            <a:ext cx="5852160" cy="228600"/>
-          </a:xfrm>
-          <a:prstGeom prst="rect">
-            <a:avLst/>
-          </a:prstGeom>
-          <a:noFill/>
-          <a:ln/>
-        </p:spPr>
-        <p:txBody>
-          <a:bodyPr wrap="square" lIns="0" tIns="0" rIns="0" bIns="0" rtlCol="0" anchor="ctr"/>
-          <a:lstStyle/>
-          <a:p>
-            <a:pPr marL="0" indent="0">
-              <a:buNone/>
-            </a:pPr>
-            <a:r>
-              <a:rPr lang="en-US" sz="950" dirty="0">
-                <a:solidFill>
-                  <a:srgbClr val="E6EDF3"/>
-                </a:solidFill>
-                <a:latin typeface="Consolas" pitchFamily="34" charset="0"/>
-                <a:ea typeface="Consolas" pitchFamily="34" charset="-122"/>
-                <a:cs typeface="Consolas" pitchFamily="34" charset="-120"/>
-              </a:rPr>
-              <a:t>    relevant = [(doc, score)</a:t>
-            </a:r>
-            <a:endParaRPr lang="en-US" sz="950" dirty="0"/>
-          </a:p>
-        </p:txBody>
-      </p:sp>
-      <p:sp>
-        <p:nvSpPr>
-          <p:cNvPr id="27" name="Text 25"/>
-          <p:cNvSpPr/>
-          <p:nvPr/>
-        </p:nvSpPr>
-        <p:spPr>
-          <a:xfrm>
-            <a:off x="5897880" y="3090672"/>
-            <a:ext cx="5852160" cy="228600"/>
-          </a:xfrm>
-          <a:prstGeom prst="rect">
-            <a:avLst/>
-          </a:prstGeom>
-          <a:noFill/>
-          <a:ln/>
-        </p:spPr>
-        <p:txBody>
-          <a:bodyPr wrap="square" lIns="0" tIns="0" rIns="0" bIns="0" rtlCol="0" anchor="ctr"/>
-          <a:lstStyle/>
-          <a:p>
-            <a:pPr marL="0" indent="0">
-              <a:buNone/>
-            </a:pPr>
-            <a:r>
-              <a:rPr lang="en-US" sz="950" dirty="0">
-                <a:solidFill>
-                  <a:srgbClr val="E6EDF3"/>
-                </a:solidFill>
-                <a:latin typeface="Consolas" pitchFamily="34" charset="0"/>
-                <a:ea typeface="Consolas" pitchFamily="34" charset="-122"/>
-                <a:cs typeface="Consolas" pitchFamily="34" charset="-120"/>
-              </a:rPr>
-              <a:t>                for doc, score in results</a:t>
-            </a:r>
-            <a:endParaRPr lang="en-US" sz="950" dirty="0"/>
-          </a:p>
-        </p:txBody>
-      </p:sp>
-      <p:sp>
-        <p:nvSpPr>
-          <p:cNvPr id="28" name="Text 26"/>
-          <p:cNvSpPr/>
-          <p:nvPr/>
-        </p:nvSpPr>
-        <p:spPr>
-          <a:xfrm>
-            <a:off x="5897880" y="3337560"/>
-            <a:ext cx="5852160" cy="228600"/>
-          </a:xfrm>
-          <a:prstGeom prst="rect">
-            <a:avLst/>
-          </a:prstGeom>
-          <a:noFill/>
-          <a:ln/>
-        </p:spPr>
-        <p:txBody>
-          <a:bodyPr wrap="square" lIns="0" tIns="0" rIns="0" bIns="0" rtlCol="0" anchor="ctr"/>
-          <a:lstStyle/>
-          <a:p>
-            <a:pPr marL="0" indent="0">
-              <a:buNone/>
-            </a:pPr>
-            <a:r>
-              <a:rPr lang="en-US" sz="950" dirty="0">
-                <a:solidFill>
-                  <a:srgbClr val="10B981"/>
-                </a:solidFill>
-                <a:latin typeface="Consolas" pitchFamily="34" charset="0"/>
-                <a:ea typeface="Consolas" pitchFamily="34" charset="-122"/>
-                <a:cs typeface="Consolas" pitchFamily="34" charset="-120"/>
-              </a:rPr>
-              <a:t>                if score &lt; DIST_THRESHOLD]</a:t>
-            </a:r>
-            <a:endParaRPr lang="en-US" sz="950" dirty="0"/>
-          </a:p>
-        </p:txBody>
-      </p:sp>
-      <p:sp>
-        <p:nvSpPr>
-          <p:cNvPr id="29" name="Text 27"/>
-          <p:cNvSpPr/>
-          <p:nvPr/>
-        </p:nvSpPr>
-        <p:spPr>
-          <a:xfrm>
-            <a:off x="5897880" y="3584448"/>
-            <a:ext cx="5852160" cy="228600"/>
-          </a:xfrm>
-          <a:prstGeom prst="rect">
-            <a:avLst/>
-          </a:prstGeom>
-          <a:noFill/>
-          <a:ln/>
-        </p:spPr>
-        <p:txBody>
-          <a:bodyPr wrap="square" lIns="0" tIns="0" rIns="0" bIns="0" rtlCol="0" anchor="ctr"/>
-          <a:lstStyle/>
-          <a:p>
-            <a:pPr marL="0" indent="0">
-              <a:buNone/>
-            </a:pPr>
-            <a:r>
-              <a:rPr lang="en-US" sz="950" dirty="0">
-                <a:solidFill>
-                  <a:srgbClr val="E6EDF3"/>
-                </a:solidFill>
-                <a:latin typeface="Consolas" pitchFamily="34" charset="0"/>
-                <a:ea typeface="Consolas" pitchFamily="34" charset="-122"/>
-                <a:cs typeface="Consolas" pitchFamily="34" charset="-120"/>
-              </a:rPr>
-              <a:t>    if not relevant:</a:t>
-            </a:r>
-            <a:endParaRPr lang="en-US" sz="950" dirty="0"/>
-          </a:p>
-        </p:txBody>
-      </p:sp>
-      <p:sp>
-        <p:nvSpPr>
-          <p:cNvPr id="30" name="Text 28"/>
-          <p:cNvSpPr/>
-          <p:nvPr/>
-        </p:nvSpPr>
-        <p:spPr>
-          <a:xfrm>
-            <a:off x="5897880" y="3831336"/>
-            <a:ext cx="5852160" cy="228600"/>
-          </a:xfrm>
-          <a:prstGeom prst="rect">
-            <a:avLst/>
-          </a:prstGeom>
-          <a:noFill/>
-          <a:ln/>
-        </p:spPr>
-        <p:txBody>
-          <a:bodyPr wrap="square" lIns="0" tIns="0" rIns="0" bIns="0" rtlCol="0" anchor="ctr"/>
-          <a:lstStyle/>
-          <a:p>
-            <a:pPr marL="0" indent="0">
-              <a:buNone/>
-            </a:pPr>
-            <a:r>
-              <a:rPr lang="en-US" sz="950" dirty="0">
-                <a:solidFill>
-                  <a:srgbClr val="DC2626"/>
-                </a:solidFill>
-                <a:latin typeface="Consolas" pitchFamily="34" charset="0"/>
-                <a:ea typeface="Consolas" pitchFamily="34" charset="-122"/>
-                <a:cs typeface="Consolas" pitchFamily="34" charset="-120"/>
-              </a:rPr>
-              <a:t>        return '관련 근거 문서를 찾지 못했습니다.'</a:t>
-            </a:r>
-            <a:endParaRPr lang="en-US" sz="950" dirty="0"/>
-          </a:p>
-        </p:txBody>
-      </p:sp>
-      <p:sp>
-        <p:nvSpPr>
-          <p:cNvPr id="31" name="Text 29"/>
-          <p:cNvSpPr/>
-          <p:nvPr/>
-        </p:nvSpPr>
-        <p:spPr>
-          <a:xfrm>
-            <a:off x="5897880" y="4078224"/>
-            <a:ext cx="5852160" cy="228600"/>
-          </a:xfrm>
-          <a:prstGeom prst="rect">
-            <a:avLst/>
-          </a:prstGeom>
-          <a:noFill/>
-          <a:ln/>
-        </p:spPr>
-        <p:txBody>
-          <a:bodyPr wrap="square" lIns="0" tIns="0" rIns="0" bIns="0" rtlCol="0" anchor="ctr"/>
-          <a:lstStyle/>
-          <a:p>
-            <a:pPr marL="0" indent="0">
-              <a:buNone/>
-            </a:pPr>
-            <a:r>
-              <a:rPr lang="en-US" sz="950" dirty="0">
-                <a:solidFill>
-                  <a:srgbClr val="8B949E"/>
-                </a:solidFill>
-                <a:latin typeface="Consolas" pitchFamily="34" charset="0"/>
-                <a:ea typeface="Consolas" pitchFamily="34" charset="-122"/>
-                <a:cs typeface="Consolas" pitchFamily="34" charset="-120"/>
-              </a:rPr>
-              <a:t>    # ③ 관련 문서만 컨텍스트에 삽입</a:t>
-            </a:r>
-            <a:endParaRPr lang="en-US" sz="950" dirty="0"/>
-          </a:p>
-        </p:txBody>
-      </p:sp>
-      <p:sp>
-        <p:nvSpPr>
-          <p:cNvPr id="32" name="Text 30"/>
-          <p:cNvSpPr/>
-          <p:nvPr/>
-        </p:nvSpPr>
-        <p:spPr>
-          <a:xfrm>
-            <a:off x="5897880" y="4325112"/>
-            <a:ext cx="5852160" cy="228600"/>
-          </a:xfrm>
-          <a:prstGeom prst="rect">
-            <a:avLst/>
-          </a:prstGeom>
-          <a:noFill/>
-          <a:ln/>
-        </p:spPr>
-        <p:txBody>
-          <a:bodyPr wrap="square" lIns="0" tIns="0" rIns="0" bIns="0" rtlCol="0" anchor="ctr"/>
-          <a:lstStyle/>
-          <a:p>
-            <a:pPr marL="0" indent="0">
-              <a:buNone/>
-            </a:pPr>
-            <a:r>
-              <a:rPr lang="en-US" sz="950" dirty="0">
-                <a:solidFill>
-                  <a:srgbClr val="E6EDF3"/>
-                </a:solidFill>
-                <a:latin typeface="Consolas" pitchFamily="34" charset="0"/>
-                <a:ea typeface="Consolas" pitchFamily="34" charset="-122"/>
-                <a:cs typeface="Consolas" pitchFamily="34" charset="-120"/>
-              </a:rPr>
-              <a:t>    context = '\n'.join(</a:t>
-            </a:r>
-            <a:endParaRPr lang="en-US" sz="950" dirty="0"/>
-          </a:p>
-        </p:txBody>
-      </p:sp>
-      <p:sp>
-        <p:nvSpPr>
-          <p:cNvPr id="33" name="Text 31"/>
-          <p:cNvSpPr/>
-          <p:nvPr/>
-        </p:nvSpPr>
-        <p:spPr>
-          <a:xfrm>
-            <a:off x="5897880" y="4572000"/>
-            <a:ext cx="5852160" cy="228600"/>
-          </a:xfrm>
-          <a:prstGeom prst="rect">
-            <a:avLst/>
-          </a:prstGeom>
-          <a:noFill/>
-          <a:ln/>
-        </p:spPr>
-        <p:txBody>
-          <a:bodyPr wrap="square" lIns="0" tIns="0" rIns="0" bIns="0" rtlCol="0" anchor="ctr"/>
-          <a:lstStyle/>
-          <a:p>
-            <a:pPr marL="0" indent="0">
-              <a:buNone/>
-            </a:pPr>
-            <a:r>
-              <a:rPr lang="en-US" sz="950" dirty="0">
-                <a:solidFill>
-                  <a:srgbClr val="E6EDF3"/>
-                </a:solidFill>
-                <a:latin typeface="Consolas" pitchFamily="34" charset="0"/>
-                <a:ea typeface="Consolas" pitchFamily="34" charset="-122"/>
-                <a:cs typeface="Consolas" pitchFamily="34" charset="-120"/>
-              </a:rPr>
-              <a:t>        [f'[출처:{doc.metadata}]\n{doc.page_content}'</a:t>
-            </a:r>
-            <a:endParaRPr lang="en-US" sz="950" dirty="0"/>
-          </a:p>
-        </p:txBody>
-      </p:sp>
-      <p:sp>
-        <p:nvSpPr>
-          <p:cNvPr id="34" name="Text 32"/>
-          <p:cNvSpPr/>
-          <p:nvPr/>
-        </p:nvSpPr>
-        <p:spPr>
-          <a:xfrm>
-            <a:off x="5897880" y="4818888"/>
-            <a:ext cx="5852160" cy="228600"/>
-          </a:xfrm>
-          <a:prstGeom prst="rect">
-            <a:avLst/>
-          </a:prstGeom>
-          <a:noFill/>
-          <a:ln/>
-        </p:spPr>
-        <p:txBody>
-          <a:bodyPr wrap="square" lIns="0" tIns="0" rIns="0" bIns="0" rtlCol="0" anchor="ctr"/>
-          <a:lstStyle/>
-          <a:p>
-            <a:pPr marL="0" indent="0">
-              <a:buNone/>
-            </a:pPr>
-            <a:r>
-              <a:rPr lang="en-US" sz="950" dirty="0">
-                <a:solidFill>
-                  <a:srgbClr val="E6EDF3"/>
-                </a:solidFill>
-                <a:latin typeface="Consolas" pitchFamily="34" charset="0"/>
-                <a:ea typeface="Consolas" pitchFamily="34" charset="-122"/>
-                <a:cs typeface="Consolas" pitchFamily="34" charset="-120"/>
-              </a:rPr>
-              <a:t>         for doc, _ in relevant])</a:t>
-            </a:r>
-            <a:endParaRPr lang="en-US" sz="950" dirty="0"/>
-          </a:p>
-        </p:txBody>
-      </p:sp>
-      <p:sp>
-        <p:nvSpPr>
-          <p:cNvPr id="35" name="Text 33"/>
-          <p:cNvSpPr/>
-          <p:nvPr/>
-        </p:nvSpPr>
-        <p:spPr>
-          <a:xfrm>
-            <a:off x="5897880" y="5065776"/>
-            <a:ext cx="5852160" cy="228600"/>
-          </a:xfrm>
-          <a:prstGeom prst="rect">
-            <a:avLst/>
-          </a:prstGeom>
-          <a:noFill/>
-          <a:ln/>
-        </p:spPr>
-        <p:txBody>
-          <a:bodyPr wrap="square" lIns="0" tIns="0" rIns="0" bIns="0" rtlCol="0" anchor="ctr"/>
-          <a:lstStyle/>
-          <a:p>
-            <a:pPr marL="0" indent="0">
-              <a:buNone/>
-            </a:pPr>
-            <a:r>
-              <a:rPr lang="en-US" sz="950" dirty="0">
-                <a:solidFill>
-                  <a:srgbClr val="E6EDF3"/>
-                </a:solidFill>
-                <a:latin typeface="Consolas" pitchFamily="34" charset="0"/>
-                <a:ea typeface="Consolas" pitchFamily="34" charset="-122"/>
-                <a:cs typeface="Consolas" pitchFamily="34" charset="-120"/>
-              </a:rPr>
-              <a:t>    sys = (f'반드시 아래 헌법 원문에서만 답하라.\n'</a:t>
-            </a:r>
-            <a:endParaRPr lang="en-US" sz="950" dirty="0"/>
-          </a:p>
-        </p:txBody>
-      </p:sp>
-      <p:sp>
-        <p:nvSpPr>
-          <p:cNvPr id="36" name="Text 34"/>
-          <p:cNvSpPr/>
-          <p:nvPr/>
-        </p:nvSpPr>
-        <p:spPr>
-          <a:xfrm>
-            <a:off x="5897880" y="5312664"/>
-            <a:ext cx="5852160" cy="228600"/>
-          </a:xfrm>
-          <a:prstGeom prst="rect">
-            <a:avLst/>
-          </a:prstGeom>
-          <a:noFill/>
-          <a:ln/>
-        </p:spPr>
-        <p:txBody>
-          <a:bodyPr wrap="square" lIns="0" tIns="0" rIns="0" bIns="0" rtlCol="0" anchor="ctr"/>
-          <a:lstStyle/>
-          <a:p>
-            <a:pPr marL="0" indent="0">
-              <a:buNone/>
-            </a:pPr>
-            <a:r>
-              <a:rPr lang="en-US" sz="950" dirty="0">
-                <a:solidFill>
-                  <a:srgbClr val="E6EDF3"/>
-                </a:solidFill>
-                <a:latin typeface="Consolas" pitchFamily="34" charset="0"/>
-                <a:ea typeface="Consolas" pitchFamily="34" charset="-122"/>
-                <a:cs typeface="Consolas" pitchFamily="34" charset="-120"/>
-              </a:rPr>
-              <a:t>           f'출처 명시 필수.\n{context}')</a:t>
-            </a:r>
-            <a:endParaRPr lang="en-US" sz="950" dirty="0"/>
-          </a:p>
-        </p:txBody>
-      </p:sp>
-      <p:sp>
-        <p:nvSpPr>
-          <p:cNvPr id="37" name="Text 35"/>
-          <p:cNvSpPr/>
-          <p:nvPr/>
-        </p:nvSpPr>
-        <p:spPr>
-          <a:xfrm>
-            <a:off x="5897880" y="5559552"/>
-            <a:ext cx="5852160" cy="228600"/>
-          </a:xfrm>
-          <a:prstGeom prst="rect">
-            <a:avLst/>
-          </a:prstGeom>
-          <a:noFill/>
-          <a:ln/>
-        </p:spPr>
-        <p:txBody>
-          <a:bodyPr wrap="square" lIns="0" tIns="0" rIns="0" bIns="0" rtlCol="0" anchor="ctr"/>
-          <a:lstStyle/>
-          <a:p>
-            <a:pPr marL="0" indent="0">
-              <a:buNone/>
-            </a:pPr>
-            <a:r>
-              <a:rPr lang="en-US" sz="950" dirty="0">
-                <a:solidFill>
-                  <a:srgbClr val="10B981"/>
-                </a:solidFill>
-                <a:latin typeface="Consolas" pitchFamily="34" charset="0"/>
-                <a:ea typeface="Consolas" pitchFamily="34" charset="-122"/>
-                <a:cs typeface="Consolas" pitchFamily="34" charset="-120"/>
-              </a:rPr>
-              <a:t>    return ask(query, system=sys)</a:t>
-            </a:r>
-            <a:endParaRPr lang="en-US" sz="950" dirty="0"/>
-          </a:p>
-        </p:txBody>
-      </p:sp>
-      <p:sp>
-        <p:nvSpPr>
-          <p:cNvPr id="38" name="Text 36"/>
-          <p:cNvSpPr/>
-          <p:nvPr/>
-        </p:nvSpPr>
-        <p:spPr>
-          <a:xfrm>
-            <a:off x="5897880" y="5806440"/>
-            <a:ext cx="5852160" cy="228600"/>
-          </a:xfrm>
-          <a:prstGeom prst="rect">
-            <a:avLst/>
-          </a:prstGeom>
-          <a:noFill/>
-          <a:ln/>
-        </p:spPr>
-        <p:txBody>
-          <a:bodyPr wrap="square" lIns="0" tIns="0" rIns="0" bIns="0" rtlCol="0" anchor="ctr"/>
-          <a:lstStyle/>
-          <a:p>
-            <a:pPr marL="0" indent="0">
-              <a:buNone/>
-            </a:pPr>
-            <a:endParaRPr lang="en-US" sz="950" dirty="0"/>
-          </a:p>
-        </p:txBody>
-      </p:sp>
-      <p:sp>
-        <p:nvSpPr>
-          <p:cNvPr id="39" name="Text 37"/>
-          <p:cNvSpPr/>
-          <p:nvPr/>
-        </p:nvSpPr>
-        <p:spPr>
-          <a:xfrm>
-            <a:off x="5897880" y="6053328"/>
-            <a:ext cx="5852160" cy="228600"/>
-          </a:xfrm>
-          <a:prstGeom prst="rect">
-            <a:avLst/>
-          </a:prstGeom>
-          <a:noFill/>
-          <a:ln/>
-        </p:spPr>
-        <p:txBody>
-          <a:bodyPr wrap="square" lIns="0" tIns="0" rIns="0" bIns="0" rtlCol="0" anchor="ctr"/>
-          <a:lstStyle/>
-          <a:p>
-            <a:pPr marL="0" indent="0">
-              <a:buNone/>
-            </a:pPr>
-            <a:r>
-              <a:rPr lang="en-US" sz="950" dirty="0">
-                <a:solidFill>
-                  <a:srgbClr val="10B981"/>
-                </a:solidFill>
-                <a:latin typeface="Consolas" pitchFamily="34" charset="0"/>
-                <a:ea typeface="Consolas" pitchFamily="34" charset="-122"/>
-                <a:cs typeface="Consolas" pitchFamily="34" charset="-120"/>
-              </a:rPr>
-              <a:t>print(rag_ask(ATTACK_B))   # 거부 확인</a:t>
-            </a:r>
-            <a:endParaRPr lang="en-US" sz="950" dirty="0"/>
-          </a:p>
-        </p:txBody>
-      </p:sp>
-      <p:sp>
-        <p:nvSpPr>
-          <p:cNvPr id="40" name="Text 38"/>
-          <p:cNvSpPr/>
-          <p:nvPr/>
-        </p:nvSpPr>
-        <p:spPr>
-          <a:xfrm>
-            <a:off x="11064240" y="6510528"/>
-            <a:ext cx="914400" cy="274320"/>
-          </a:xfrm>
-          <a:prstGeom prst="rect">
-            <a:avLst/>
-          </a:prstGeom>
-          <a:noFill/>
-          <a:ln/>
-        </p:spPr>
-        <p:txBody>
-          <a:bodyPr wrap="square" lIns="0" tIns="0" rIns="0" bIns="0" rtlCol="0" anchor="ctr"/>
-          <a:lstStyle/>
-          <a:p>
-            <a:pPr marL="0" indent="0" algn="r">
-              <a:buNone/>
-            </a:pPr>
-            <a:r>
-              <a:rPr lang="en-US" sz="900" dirty="0">
-                <a:solidFill>
-                  <a:srgbClr val="94A3B8"/>
-                </a:solidFill>
-                <a:latin typeface="Arial" pitchFamily="34" charset="0"/>
-                <a:ea typeface="Arial" pitchFamily="34" charset="-122"/>
-                <a:cs typeface="Arial" pitchFamily="34" charset="-120"/>
-              </a:rPr>
-              <a:t>9 / 18</a:t>
             </a:r>
             <a:endParaRPr lang="en-US" sz="900" dirty="0"/>
           </a:p>
